--- a/AIA_response_functions.pptx
+++ b/AIA_response_functions.pptx
@@ -111,6 +111,11 @@
       </a:defRPr>
     </a:lvl9pPr>
   </p:defaultTextStyle>
+  <p:extLst>
+    <p:ext uri="{EFAFB233-063F-42B5-8137-9DF3F51BA10A}">
+      <p15:sldGuideLst xmlns:p15="http://schemas.microsoft.com/office/powerpoint/2012/main"/>
+    </p:ext>
+  </p:extLst>
 </p:presentation>
 </file>
 
@@ -261,7 +266,7 @@
           <a:p>
             <a:fld id="{7F93A7E9-2842-EB4A-A538-B6D599C0B0B0}" type="datetimeFigureOut">
               <a:rPr lang="en-US" smtClean="0"/>
-              <a:t>10/12/26</a:t>
+              <a:t>10/14/26</a:t>
             </a:fld>
             <a:endParaRPr lang="en-US"/>
           </a:p>
@@ -459,7 +464,7 @@
           <a:p>
             <a:fld id="{7F93A7E9-2842-EB4A-A538-B6D599C0B0B0}" type="datetimeFigureOut">
               <a:rPr lang="en-US" smtClean="0"/>
-              <a:t>10/12/26</a:t>
+              <a:t>10/14/26</a:t>
             </a:fld>
             <a:endParaRPr lang="en-US"/>
           </a:p>
@@ -667,7 +672,7 @@
           <a:p>
             <a:fld id="{7F93A7E9-2842-EB4A-A538-B6D599C0B0B0}" type="datetimeFigureOut">
               <a:rPr lang="en-US" smtClean="0"/>
-              <a:t>10/12/26</a:t>
+              <a:t>10/14/26</a:t>
             </a:fld>
             <a:endParaRPr lang="en-US"/>
           </a:p>
@@ -865,7 +870,7 @@
           <a:p>
             <a:fld id="{7F93A7E9-2842-EB4A-A538-B6D599C0B0B0}" type="datetimeFigureOut">
               <a:rPr lang="en-US" smtClean="0"/>
-              <a:t>10/12/26</a:t>
+              <a:t>10/14/26</a:t>
             </a:fld>
             <a:endParaRPr lang="en-US"/>
           </a:p>
@@ -1140,7 +1145,7 @@
           <a:p>
             <a:fld id="{7F93A7E9-2842-EB4A-A538-B6D599C0B0B0}" type="datetimeFigureOut">
               <a:rPr lang="en-US" smtClean="0"/>
-              <a:t>10/12/26</a:t>
+              <a:t>10/14/26</a:t>
             </a:fld>
             <a:endParaRPr lang="en-US"/>
           </a:p>
@@ -1405,7 +1410,7 @@
           <a:p>
             <a:fld id="{7F93A7E9-2842-EB4A-A538-B6D599C0B0B0}" type="datetimeFigureOut">
               <a:rPr lang="en-US" smtClean="0"/>
-              <a:t>10/12/26</a:t>
+              <a:t>10/14/26</a:t>
             </a:fld>
             <a:endParaRPr lang="en-US"/>
           </a:p>
@@ -1817,7 +1822,7 @@
           <a:p>
             <a:fld id="{7F93A7E9-2842-EB4A-A538-B6D599C0B0B0}" type="datetimeFigureOut">
               <a:rPr lang="en-US" smtClean="0"/>
-              <a:t>10/12/26</a:t>
+              <a:t>10/14/26</a:t>
             </a:fld>
             <a:endParaRPr lang="en-US"/>
           </a:p>
@@ -1958,7 +1963,7 @@
           <a:p>
             <a:fld id="{7F93A7E9-2842-EB4A-A538-B6D599C0B0B0}" type="datetimeFigureOut">
               <a:rPr lang="en-US" smtClean="0"/>
-              <a:t>10/12/26</a:t>
+              <a:t>10/14/26</a:t>
             </a:fld>
             <a:endParaRPr lang="en-US"/>
           </a:p>
@@ -2071,7 +2076,7 @@
           <a:p>
             <a:fld id="{7F93A7E9-2842-EB4A-A538-B6D599C0B0B0}" type="datetimeFigureOut">
               <a:rPr lang="en-US" smtClean="0"/>
-              <a:t>10/12/26</a:t>
+              <a:t>10/14/26</a:t>
             </a:fld>
             <a:endParaRPr lang="en-US"/>
           </a:p>
@@ -2382,7 +2387,7 @@
           <a:p>
             <a:fld id="{7F93A7E9-2842-EB4A-A538-B6D599C0B0B0}" type="datetimeFigureOut">
               <a:rPr lang="en-US" smtClean="0"/>
-              <a:t>10/12/26</a:t>
+              <a:t>10/14/26</a:t>
             </a:fld>
             <a:endParaRPr lang="en-US"/>
           </a:p>
@@ -2670,7 +2675,7 @@
           <a:p>
             <a:fld id="{7F93A7E9-2842-EB4A-A538-B6D599C0B0B0}" type="datetimeFigureOut">
               <a:rPr lang="en-US" smtClean="0"/>
-              <a:t>10/12/26</a:t>
+              <a:t>10/14/26</a:t>
             </a:fld>
             <a:endParaRPr lang="en-US"/>
           </a:p>
@@ -2911,7 +2916,7 @@
           <a:p>
             <a:fld id="{7F93A7E9-2842-EB4A-A538-B6D599C0B0B0}" type="datetimeFigureOut">
               <a:rPr lang="en-US" smtClean="0"/>
-              <a:t>10/12/26</a:t>
+              <a:t>10/14/26</a:t>
             </a:fld>
             <a:endParaRPr lang="en-US"/>
           </a:p>
@@ -3378,7 +3383,7 @@
         <p:spPr>
           <a:xfrm>
             <a:off x="3355987" y="1935125"/>
-            <a:ext cx="5480026" cy="3279552"/>
+            <a:ext cx="6304546" cy="3279552"/>
           </a:xfrm>
           <a:prstGeom prst="rect">
             <a:avLst/>
@@ -3401,7 +3406,10 @@
             <a:r>
               <a:rPr lang="en-US" sz="2000" dirty="0">
                 <a:solidFill>
-                  <a:srgbClr val="0070C0"/>
+                  <a:schemeClr val="tx2">
+                    <a:lumMod val="50000"/>
+                    <a:lumOff val="50000"/>
+                  </a:schemeClr>
                 </a:solidFill>
               </a:rPr>
               <a:t>Chianti version: 11.02</a:t>
@@ -3418,10 +3426,35 @@
             <a:r>
               <a:rPr lang="en-US" sz="2000" dirty="0">
                 <a:solidFill>
-                  <a:srgbClr val="0070C0"/>
+                  <a:schemeClr val="tx2">
+                    <a:lumMod val="50000"/>
+                    <a:lumOff val="50000"/>
+                  </a:schemeClr>
                 </a:solidFill>
               </a:rPr>
-              <a:t>AIA effective area version: 10</a:t>
+              <a:t>AIA effective area version: 10 (applied /</a:t>
+            </a:r>
+            <a:r>
+              <a:rPr lang="en-US" sz="2000" dirty="0" err="1">
+                <a:solidFill>
+                  <a:schemeClr val="tx2">
+                    <a:lumMod val="50000"/>
+                    <a:lumOff val="50000"/>
+                  </a:schemeClr>
+                </a:solidFill>
+              </a:rPr>
+              <a:t>evenorm</a:t>
+            </a:r>
+            <a:r>
+              <a:rPr lang="en-US" sz="2000" dirty="0">
+                <a:solidFill>
+                  <a:schemeClr val="tx2">
+                    <a:lumMod val="50000"/>
+                    <a:lumOff val="50000"/>
+                  </a:schemeClr>
+                </a:solidFill>
+              </a:rPr>
+              <a:t>, /dn)</a:t>
             </a:r>
           </a:p>
           <a:p>
@@ -3435,7 +3468,10 @@
             <a:r>
               <a:rPr lang="en-US" sz="2000" dirty="0">
                 <a:solidFill>
-                  <a:srgbClr val="0070C0"/>
+                  <a:schemeClr val="tx2">
+                    <a:lumMod val="50000"/>
+                    <a:lumOff val="50000"/>
+                  </a:schemeClr>
                 </a:solidFill>
               </a:rPr>
               <a:t>Abundance database:</a:t>
@@ -3506,7 +3542,7 @@
         </p:nvSpPr>
         <p:spPr>
           <a:xfrm>
-            <a:off x="816049" y="5479291"/>
+            <a:off x="911299" y="4928448"/>
             <a:ext cx="10369402" cy="883383"/>
           </a:xfrm>
           <a:prstGeom prst="rect">
@@ -3561,7 +3597,7 @@
             </a:r>
             <a:r>
               <a:rPr lang="en-US" dirty="0"/>
-              <a:t>=‘1-Oct-2026’, /</a:t>
+              <a:t>=‘1-May-2010’, /</a:t>
             </a:r>
             <a:r>
               <a:rPr lang="en-US" dirty="0" err="1"/>
@@ -3614,7 +3650,7 @@
       </p:grpSpPr>
       <p:sp useBgFill="1">
         <p:nvSpPr>
-          <p:cNvPr id="26" name="Rectangle 25">
+          <p:cNvPr id="39" name="Rectangle 38">
             <a:extLst>
               <a:ext uri="{FF2B5EF4-FFF2-40B4-BE49-F238E27FC236}">
                 <a16:creationId xmlns:a16="http://schemas.microsoft.com/office/drawing/2014/main" id="{0288C6B4-AFC3-407F-A595-EFFD38D4CCAF}"/>
@@ -3674,7 +3710,7 @@
       </p:sp>
       <p:sp useBgFill="1">
         <p:nvSpPr>
-          <p:cNvPr id="28" name="Freeform: Shape 27">
+          <p:cNvPr id="41" name="Freeform: Shape 40">
             <a:extLst>
               <a:ext uri="{FF2B5EF4-FFF2-40B4-BE49-F238E27FC236}">
                 <a16:creationId xmlns:a16="http://schemas.microsoft.com/office/drawing/2014/main" id="{CF236821-17FE-429B-8D2C-08E13A64EA40}"/>
@@ -3846,7 +3882,7 @@
       </p:sp>
       <p:sp useBgFill="1">
         <p:nvSpPr>
-          <p:cNvPr id="30" name="Freeform: Shape 29">
+          <p:cNvPr id="43" name="Freeform: Shape 42">
             <a:extLst>
               <a:ext uri="{FF2B5EF4-FFF2-40B4-BE49-F238E27FC236}">
                 <a16:creationId xmlns:a16="http://schemas.microsoft.com/office/drawing/2014/main" id="{C0BDBCD2-E081-43AB-9119-C55465E59757}"/>
@@ -4061,7 +4097,7 @@
       </p:sp>
       <p:sp>
         <p:nvSpPr>
-          <p:cNvPr id="32" name="Rectangle 31">
+          <p:cNvPr id="45" name="Rectangle 44">
             <a:extLst>
               <a:ext uri="{FF2B5EF4-FFF2-40B4-BE49-F238E27FC236}">
                 <a16:creationId xmlns:a16="http://schemas.microsoft.com/office/drawing/2014/main" id="{98E79BE4-34FE-485A-98A5-92CE8F7C4743}"/>
@@ -4129,7 +4165,7 @@
       </p:sp>
       <p:sp>
         <p:nvSpPr>
-          <p:cNvPr id="34" name="Rectangle 33">
+          <p:cNvPr id="47" name="Rectangle 46">
             <a:extLst>
               <a:ext uri="{FF2B5EF4-FFF2-40B4-BE49-F238E27FC236}">
                 <a16:creationId xmlns:a16="http://schemas.microsoft.com/office/drawing/2014/main" id="{7A5F0580-5EE9-419F-96EE-B6529EF6E7D0}"/>
@@ -4337,10 +4373,10 @@
       </p:sp>
       <p:pic>
         <p:nvPicPr>
-          <p:cNvPr id="12" name="Picture 11">
-            <a:extLst>
-              <a:ext uri="{FF2B5EF4-FFF2-40B4-BE49-F238E27FC236}">
-                <a16:creationId xmlns:a16="http://schemas.microsoft.com/office/drawing/2014/main" id="{60348931-1746-C2FC-B886-26CC63736F17}"/>
+          <p:cNvPr id="2" name="Picture 1">
+            <a:extLst>
+              <a:ext uri="{FF2B5EF4-FFF2-40B4-BE49-F238E27FC236}">
+                <a16:creationId xmlns:a16="http://schemas.microsoft.com/office/drawing/2014/main" id="{F73A4AAE-BF62-1E5E-D626-8493E060FB51}"/>
               </a:ext>
             </a:extLst>
           </p:cNvPr>
@@ -4357,14 +4393,79 @@
         </p:blipFill>
         <p:spPr>
           <a:xfrm>
-            <a:off x="4901184" y="883539"/>
-            <a:ext cx="6922008" cy="5191505"/>
+            <a:off x="4901184" y="1004675"/>
+            <a:ext cx="6922008" cy="4949233"/>
           </a:xfrm>
           <a:prstGeom prst="rect">
             <a:avLst/>
           </a:prstGeom>
         </p:spPr>
       </p:pic>
+      <p:sp>
+        <p:nvSpPr>
+          <p:cNvPr id="3" name="TextBox 2">
+            <a:extLst>
+              <a:ext uri="{FF2B5EF4-FFF2-40B4-BE49-F238E27FC236}">
+                <a16:creationId xmlns:a16="http://schemas.microsoft.com/office/drawing/2014/main" id="{2B51519B-DA03-D430-C683-78276503646A}"/>
+              </a:ext>
+            </a:extLst>
+          </p:cNvPr>
+          <p:cNvSpPr txBox="1"/>
+          <p:nvPr/>
+        </p:nvSpPr>
+        <p:spPr>
+          <a:xfrm>
+            <a:off x="368808" y="5910094"/>
+            <a:ext cx="11521937" cy="646331"/>
+          </a:xfrm>
+          <a:prstGeom prst="rect">
+            <a:avLst/>
+          </a:prstGeom>
+          <a:noFill/>
+        </p:spPr>
+        <p:txBody>
+          <a:bodyPr wrap="none" rtlCol="0">
+            <a:spAutoFit/>
+          </a:bodyPr>
+          <a:lstStyle/>
+          <a:p>
+            <a:r>
+              <a:rPr lang="en-US" dirty="0"/>
+              <a:t>This passband show significant deviation in between 6.0&lt; </a:t>
+            </a:r>
+            <a:r>
+              <a:rPr lang="en-US" dirty="0" err="1"/>
+              <a:t>logT</a:t>
+            </a:r>
+            <a:r>
+              <a:rPr lang="en-US" dirty="0"/>
+              <a:t> &lt; 6.5 .</a:t>
+            </a:r>
+          </a:p>
+          <a:p>
+            <a:r>
+              <a:rPr lang="en-US" b="1" dirty="0"/>
+              <a:t>- Change of atomic data in new Chianti version or the effect of ‘</a:t>
+            </a:r>
+            <a:r>
+              <a:rPr lang="en-US" b="1" dirty="0" err="1"/>
+              <a:t>chiantifix</a:t>
+            </a:r>
+            <a:r>
+              <a:rPr lang="en-US" b="1" dirty="0"/>
+              <a:t>’ analytical factor in </a:t>
+            </a:r>
+            <a:r>
+              <a:rPr lang="en-US" b="1" dirty="0" err="1"/>
+              <a:t>ssw</a:t>
+            </a:r>
+            <a:r>
+              <a:rPr lang="en-US" b="1" dirty="0"/>
+              <a:t> calculation?</a:t>
+            </a:r>
+          </a:p>
+        </p:txBody>
+      </p:sp>
     </p:spTree>
     <p:extLst>
       <p:ext uri="{BB962C8B-B14F-4D97-AF65-F5344CB8AC3E}">
@@ -4411,7 +4512,7 @@
       </p:grpSpPr>
       <p:sp useBgFill="1">
         <p:nvSpPr>
-          <p:cNvPr id="38" name="Rectangle 37">
+          <p:cNvPr id="51" name="Rectangle 50">
             <a:extLst>
               <a:ext uri="{FF2B5EF4-FFF2-40B4-BE49-F238E27FC236}">
                 <a16:creationId xmlns:a16="http://schemas.microsoft.com/office/drawing/2014/main" id="{0288C6B4-AFC3-407F-A595-EFFD38D4CCAF}"/>
@@ -4471,7 +4572,7 @@
       </p:sp>
       <p:sp useBgFill="1">
         <p:nvSpPr>
-          <p:cNvPr id="40" name="Freeform: Shape 39">
+          <p:cNvPr id="53" name="Freeform: Shape 52">
             <a:extLst>
               <a:ext uri="{FF2B5EF4-FFF2-40B4-BE49-F238E27FC236}">
                 <a16:creationId xmlns:a16="http://schemas.microsoft.com/office/drawing/2014/main" id="{CF236821-17FE-429B-8D2C-08E13A64EA40}"/>
@@ -4643,7 +4744,7 @@
       </p:sp>
       <p:sp useBgFill="1">
         <p:nvSpPr>
-          <p:cNvPr id="42" name="Freeform: Shape 41">
+          <p:cNvPr id="55" name="Freeform: Shape 54">
             <a:extLst>
               <a:ext uri="{FF2B5EF4-FFF2-40B4-BE49-F238E27FC236}">
                 <a16:creationId xmlns:a16="http://schemas.microsoft.com/office/drawing/2014/main" id="{C0BDBCD2-E081-43AB-9119-C55465E59757}"/>
@@ -4858,7 +4959,7 @@
       </p:sp>
       <p:sp>
         <p:nvSpPr>
-          <p:cNvPr id="44" name="Rectangle 43">
+          <p:cNvPr id="57" name="Rectangle 56">
             <a:extLst>
               <a:ext uri="{FF2B5EF4-FFF2-40B4-BE49-F238E27FC236}">
                 <a16:creationId xmlns:a16="http://schemas.microsoft.com/office/drawing/2014/main" id="{98E79BE4-34FE-485A-98A5-92CE8F7C4743}"/>
@@ -4926,7 +5027,7 @@
       </p:sp>
       <p:sp>
         <p:nvSpPr>
-          <p:cNvPr id="46" name="Rectangle 45">
+          <p:cNvPr id="59" name="Rectangle 58">
             <a:extLst>
               <a:ext uri="{FF2B5EF4-FFF2-40B4-BE49-F238E27FC236}">
                 <a16:creationId xmlns:a16="http://schemas.microsoft.com/office/drawing/2014/main" id="{7A5F0580-5EE9-419F-96EE-B6529EF6E7D0}"/>
@@ -5134,10 +5235,10 @@
       </p:sp>
       <p:pic>
         <p:nvPicPr>
-          <p:cNvPr id="11" name="Picture 10">
-            <a:extLst>
-              <a:ext uri="{FF2B5EF4-FFF2-40B4-BE49-F238E27FC236}">
-                <a16:creationId xmlns:a16="http://schemas.microsoft.com/office/drawing/2014/main" id="{364248A4-FBE7-49F5-7975-E0F316B15B1F}"/>
+          <p:cNvPr id="2" name="Picture 1">
+            <a:extLst>
+              <a:ext uri="{FF2B5EF4-FFF2-40B4-BE49-F238E27FC236}">
+                <a16:creationId xmlns:a16="http://schemas.microsoft.com/office/drawing/2014/main" id="{2EA15CC5-2B15-02B3-9943-E5F05F68ADED}"/>
               </a:ext>
             </a:extLst>
           </p:cNvPr>
@@ -5154,14 +5255,49 @@
         </p:blipFill>
         <p:spPr>
           <a:xfrm>
-            <a:off x="4901184" y="883539"/>
-            <a:ext cx="6922008" cy="5191505"/>
+            <a:off x="4901184" y="1004675"/>
+            <a:ext cx="6922008" cy="4949233"/>
           </a:xfrm>
           <a:prstGeom prst="rect">
             <a:avLst/>
           </a:prstGeom>
         </p:spPr>
       </p:pic>
+      <p:sp>
+        <p:nvSpPr>
+          <p:cNvPr id="3" name="TextBox 2">
+            <a:extLst>
+              <a:ext uri="{FF2B5EF4-FFF2-40B4-BE49-F238E27FC236}">
+                <a16:creationId xmlns:a16="http://schemas.microsoft.com/office/drawing/2014/main" id="{DB50A09B-A667-2C93-CAF7-7AFF4DA57E60}"/>
+              </a:ext>
+            </a:extLst>
+          </p:cNvPr>
+          <p:cNvSpPr txBox="1"/>
+          <p:nvPr/>
+        </p:nvSpPr>
+        <p:spPr>
+          <a:xfrm>
+            <a:off x="368808" y="5910094"/>
+            <a:ext cx="2549609" cy="369332"/>
+          </a:xfrm>
+          <a:prstGeom prst="rect">
+            <a:avLst/>
+          </a:prstGeom>
+          <a:noFill/>
+        </p:spPr>
+        <p:txBody>
+          <a:bodyPr wrap="none" rtlCol="0">
+            <a:spAutoFit/>
+          </a:bodyPr>
+          <a:lstStyle/>
+          <a:p>
+            <a:r>
+              <a:rPr lang="en-US" dirty="0"/>
+              <a:t>Overall good agreement</a:t>
+            </a:r>
+          </a:p>
+        </p:txBody>
+      </p:sp>
     </p:spTree>
     <p:extLst>
       <p:ext uri="{BB962C8B-B14F-4D97-AF65-F5344CB8AC3E}">
@@ -5208,7 +5344,7 @@
       </p:grpSpPr>
       <p:sp useBgFill="1">
         <p:nvSpPr>
-          <p:cNvPr id="26" name="Rectangle 25">
+          <p:cNvPr id="39" name="Rectangle 38">
             <a:extLst>
               <a:ext uri="{FF2B5EF4-FFF2-40B4-BE49-F238E27FC236}">
                 <a16:creationId xmlns:a16="http://schemas.microsoft.com/office/drawing/2014/main" id="{0288C6B4-AFC3-407F-A595-EFFD38D4CCAF}"/>
@@ -5268,7 +5404,7 @@
       </p:sp>
       <p:sp useBgFill="1">
         <p:nvSpPr>
-          <p:cNvPr id="28" name="Freeform: Shape 27">
+          <p:cNvPr id="41" name="Freeform: Shape 40">
             <a:extLst>
               <a:ext uri="{FF2B5EF4-FFF2-40B4-BE49-F238E27FC236}">
                 <a16:creationId xmlns:a16="http://schemas.microsoft.com/office/drawing/2014/main" id="{CF236821-17FE-429B-8D2C-08E13A64EA40}"/>
@@ -5440,7 +5576,7 @@
       </p:sp>
       <p:sp useBgFill="1">
         <p:nvSpPr>
-          <p:cNvPr id="30" name="Freeform: Shape 29">
+          <p:cNvPr id="43" name="Freeform: Shape 42">
             <a:extLst>
               <a:ext uri="{FF2B5EF4-FFF2-40B4-BE49-F238E27FC236}">
                 <a16:creationId xmlns:a16="http://schemas.microsoft.com/office/drawing/2014/main" id="{C0BDBCD2-E081-43AB-9119-C55465E59757}"/>
@@ -5655,7 +5791,7 @@
       </p:sp>
       <p:sp>
         <p:nvSpPr>
-          <p:cNvPr id="32" name="Rectangle 31">
+          <p:cNvPr id="45" name="Rectangle 44">
             <a:extLst>
               <a:ext uri="{FF2B5EF4-FFF2-40B4-BE49-F238E27FC236}">
                 <a16:creationId xmlns:a16="http://schemas.microsoft.com/office/drawing/2014/main" id="{98E79BE4-34FE-485A-98A5-92CE8F7C4743}"/>
@@ -5723,7 +5859,7 @@
       </p:sp>
       <p:sp>
         <p:nvSpPr>
-          <p:cNvPr id="34" name="Rectangle 33">
+          <p:cNvPr id="47" name="Rectangle 46">
             <a:extLst>
               <a:ext uri="{FF2B5EF4-FFF2-40B4-BE49-F238E27FC236}">
                 <a16:creationId xmlns:a16="http://schemas.microsoft.com/office/drawing/2014/main" id="{7A5F0580-5EE9-419F-96EE-B6529EF6E7D0}"/>
@@ -5931,10 +6067,10 @@
       </p:sp>
       <p:pic>
         <p:nvPicPr>
-          <p:cNvPr id="14" name="Picture 13">
-            <a:extLst>
-              <a:ext uri="{FF2B5EF4-FFF2-40B4-BE49-F238E27FC236}">
-                <a16:creationId xmlns:a16="http://schemas.microsoft.com/office/drawing/2014/main" id="{47C88023-D3D4-B98C-1701-E4AC2044E991}"/>
+          <p:cNvPr id="2" name="Picture 1">
+            <a:extLst>
+              <a:ext uri="{FF2B5EF4-FFF2-40B4-BE49-F238E27FC236}">
+                <a16:creationId xmlns:a16="http://schemas.microsoft.com/office/drawing/2014/main" id="{FA0018A7-4CCB-82A8-08AA-1AECC0DD5F05}"/>
               </a:ext>
             </a:extLst>
           </p:cNvPr>
@@ -5951,14 +6087,49 @@
         </p:blipFill>
         <p:spPr>
           <a:xfrm>
-            <a:off x="4901184" y="883539"/>
-            <a:ext cx="6922008" cy="5191505"/>
+            <a:off x="4901184" y="1004675"/>
+            <a:ext cx="6922008" cy="4949233"/>
           </a:xfrm>
           <a:prstGeom prst="rect">
             <a:avLst/>
           </a:prstGeom>
         </p:spPr>
       </p:pic>
+      <p:sp>
+        <p:nvSpPr>
+          <p:cNvPr id="3" name="TextBox 2">
+            <a:extLst>
+              <a:ext uri="{FF2B5EF4-FFF2-40B4-BE49-F238E27FC236}">
+                <a16:creationId xmlns:a16="http://schemas.microsoft.com/office/drawing/2014/main" id="{35816EF0-CADF-3D00-F844-2A2C47756716}"/>
+              </a:ext>
+            </a:extLst>
+          </p:cNvPr>
+          <p:cNvSpPr txBox="1"/>
+          <p:nvPr/>
+        </p:nvSpPr>
+        <p:spPr>
+          <a:xfrm>
+            <a:off x="368808" y="5910094"/>
+            <a:ext cx="2549609" cy="369332"/>
+          </a:xfrm>
+          <a:prstGeom prst="rect">
+            <a:avLst/>
+          </a:prstGeom>
+          <a:noFill/>
+        </p:spPr>
+        <p:txBody>
+          <a:bodyPr wrap="none" rtlCol="0">
+            <a:spAutoFit/>
+          </a:bodyPr>
+          <a:lstStyle/>
+          <a:p>
+            <a:r>
+              <a:rPr lang="en-US" dirty="0"/>
+              <a:t>Overall good agreement</a:t>
+            </a:r>
+          </a:p>
+        </p:txBody>
+      </p:sp>
     </p:spTree>
     <p:extLst>
       <p:ext uri="{BB962C8B-B14F-4D97-AF65-F5344CB8AC3E}">
@@ -6005,7 +6176,7 @@
       </p:grpSpPr>
       <p:sp useBgFill="1">
         <p:nvSpPr>
-          <p:cNvPr id="24" name="Rectangle 23">
+          <p:cNvPr id="37" name="Rectangle 36">
             <a:extLst>
               <a:ext uri="{FF2B5EF4-FFF2-40B4-BE49-F238E27FC236}">
                 <a16:creationId xmlns:a16="http://schemas.microsoft.com/office/drawing/2014/main" id="{0288C6B4-AFC3-407F-A595-EFFD38D4CCAF}"/>
@@ -6065,7 +6236,7 @@
       </p:sp>
       <p:sp useBgFill="1">
         <p:nvSpPr>
-          <p:cNvPr id="26" name="Freeform: Shape 25">
+          <p:cNvPr id="39" name="Freeform: Shape 38">
             <a:extLst>
               <a:ext uri="{FF2B5EF4-FFF2-40B4-BE49-F238E27FC236}">
                 <a16:creationId xmlns:a16="http://schemas.microsoft.com/office/drawing/2014/main" id="{CF236821-17FE-429B-8D2C-08E13A64EA40}"/>
@@ -6237,7 +6408,7 @@
       </p:sp>
       <p:sp useBgFill="1">
         <p:nvSpPr>
-          <p:cNvPr id="28" name="Freeform: Shape 27">
+          <p:cNvPr id="41" name="Freeform: Shape 40">
             <a:extLst>
               <a:ext uri="{FF2B5EF4-FFF2-40B4-BE49-F238E27FC236}">
                 <a16:creationId xmlns:a16="http://schemas.microsoft.com/office/drawing/2014/main" id="{C0BDBCD2-E081-43AB-9119-C55465E59757}"/>
@@ -6452,7 +6623,7 @@
       </p:sp>
       <p:sp>
         <p:nvSpPr>
-          <p:cNvPr id="30" name="Rectangle 29">
+          <p:cNvPr id="43" name="Rectangle 42">
             <a:extLst>
               <a:ext uri="{FF2B5EF4-FFF2-40B4-BE49-F238E27FC236}">
                 <a16:creationId xmlns:a16="http://schemas.microsoft.com/office/drawing/2014/main" id="{98E79BE4-34FE-485A-98A5-92CE8F7C4743}"/>
@@ -6520,7 +6691,7 @@
       </p:sp>
       <p:sp>
         <p:nvSpPr>
-          <p:cNvPr id="32" name="Rectangle 31">
+          <p:cNvPr id="45" name="Rectangle 44">
             <a:extLst>
               <a:ext uri="{FF2B5EF4-FFF2-40B4-BE49-F238E27FC236}">
                 <a16:creationId xmlns:a16="http://schemas.microsoft.com/office/drawing/2014/main" id="{7A5F0580-5EE9-419F-96EE-B6529EF6E7D0}"/>
@@ -6728,10 +6899,10 @@
       </p:sp>
       <p:pic>
         <p:nvPicPr>
-          <p:cNvPr id="10" name="Picture 9">
-            <a:extLst>
-              <a:ext uri="{FF2B5EF4-FFF2-40B4-BE49-F238E27FC236}">
-                <a16:creationId xmlns:a16="http://schemas.microsoft.com/office/drawing/2014/main" id="{D506A190-2EAA-467A-9956-CC4D14BCDE5B}"/>
+          <p:cNvPr id="2" name="Picture 1">
+            <a:extLst>
+              <a:ext uri="{FF2B5EF4-FFF2-40B4-BE49-F238E27FC236}">
+                <a16:creationId xmlns:a16="http://schemas.microsoft.com/office/drawing/2014/main" id="{CC531AD5-440A-0834-D8D1-7055B0E948F5}"/>
               </a:ext>
             </a:extLst>
           </p:cNvPr>
@@ -6748,14 +6919,49 @@
         </p:blipFill>
         <p:spPr>
           <a:xfrm>
-            <a:off x="4901184" y="883539"/>
-            <a:ext cx="6922008" cy="5191505"/>
+            <a:off x="4901184" y="1004675"/>
+            <a:ext cx="6922008" cy="4949233"/>
           </a:xfrm>
           <a:prstGeom prst="rect">
             <a:avLst/>
           </a:prstGeom>
         </p:spPr>
       </p:pic>
+      <p:sp>
+        <p:nvSpPr>
+          <p:cNvPr id="3" name="TextBox 2">
+            <a:extLst>
+              <a:ext uri="{FF2B5EF4-FFF2-40B4-BE49-F238E27FC236}">
+                <a16:creationId xmlns:a16="http://schemas.microsoft.com/office/drawing/2014/main" id="{5F125B02-0508-C44D-3C4E-93D0F9E25769}"/>
+              </a:ext>
+            </a:extLst>
+          </p:cNvPr>
+          <p:cNvSpPr txBox="1"/>
+          <p:nvPr/>
+        </p:nvSpPr>
+        <p:spPr>
+          <a:xfrm>
+            <a:off x="368808" y="5910094"/>
+            <a:ext cx="2549609" cy="369332"/>
+          </a:xfrm>
+          <a:prstGeom prst="rect">
+            <a:avLst/>
+          </a:prstGeom>
+          <a:noFill/>
+        </p:spPr>
+        <p:txBody>
+          <a:bodyPr wrap="none" rtlCol="0">
+            <a:spAutoFit/>
+          </a:bodyPr>
+          <a:lstStyle/>
+          <a:p>
+            <a:r>
+              <a:rPr lang="en-US" dirty="0"/>
+              <a:t>Overall good agreement</a:t>
+            </a:r>
+          </a:p>
+        </p:txBody>
+      </p:sp>
     </p:spTree>
     <p:extLst>
       <p:ext uri="{BB962C8B-B14F-4D97-AF65-F5344CB8AC3E}">
@@ -6802,7 +7008,7 @@
       </p:grpSpPr>
       <p:sp useBgFill="1">
         <p:nvSpPr>
-          <p:cNvPr id="15" name="Rectangle 14">
+          <p:cNvPr id="28" name="Rectangle 27">
             <a:extLst>
               <a:ext uri="{FF2B5EF4-FFF2-40B4-BE49-F238E27FC236}">
                 <a16:creationId xmlns:a16="http://schemas.microsoft.com/office/drawing/2014/main" id="{0288C6B4-AFC3-407F-A595-EFFD38D4CCAF}"/>
@@ -6862,7 +7068,7 @@
       </p:sp>
       <p:sp useBgFill="1">
         <p:nvSpPr>
-          <p:cNvPr id="17" name="Freeform: Shape 16">
+          <p:cNvPr id="30" name="Freeform: Shape 29">
             <a:extLst>
               <a:ext uri="{FF2B5EF4-FFF2-40B4-BE49-F238E27FC236}">
                 <a16:creationId xmlns:a16="http://schemas.microsoft.com/office/drawing/2014/main" id="{CF236821-17FE-429B-8D2C-08E13A64EA40}"/>
@@ -7034,7 +7240,7 @@
       </p:sp>
       <p:sp useBgFill="1">
         <p:nvSpPr>
-          <p:cNvPr id="19" name="Freeform: Shape 18">
+          <p:cNvPr id="32" name="Freeform: Shape 31">
             <a:extLst>
               <a:ext uri="{FF2B5EF4-FFF2-40B4-BE49-F238E27FC236}">
                 <a16:creationId xmlns:a16="http://schemas.microsoft.com/office/drawing/2014/main" id="{C0BDBCD2-E081-43AB-9119-C55465E59757}"/>
@@ -7249,7 +7455,7 @@
       </p:sp>
       <p:sp>
         <p:nvSpPr>
-          <p:cNvPr id="21" name="Rectangle 20">
+          <p:cNvPr id="34" name="Rectangle 33">
             <a:extLst>
               <a:ext uri="{FF2B5EF4-FFF2-40B4-BE49-F238E27FC236}">
                 <a16:creationId xmlns:a16="http://schemas.microsoft.com/office/drawing/2014/main" id="{98E79BE4-34FE-485A-98A5-92CE8F7C4743}"/>
@@ -7317,7 +7523,7 @@
       </p:sp>
       <p:sp>
         <p:nvSpPr>
-          <p:cNvPr id="23" name="Rectangle 22">
+          <p:cNvPr id="36" name="Rectangle 35">
             <a:extLst>
               <a:ext uri="{FF2B5EF4-FFF2-40B4-BE49-F238E27FC236}">
                 <a16:creationId xmlns:a16="http://schemas.microsoft.com/office/drawing/2014/main" id="{7A5F0580-5EE9-419F-96EE-B6529EF6E7D0}"/>
@@ -7408,12 +7614,127 @@
           </a:p>
         </p:txBody>
       </p:sp>
+      <p:sp>
+        <p:nvSpPr>
+          <p:cNvPr id="11" name="TextBox 10">
+            <a:extLst>
+              <a:ext uri="{FF2B5EF4-FFF2-40B4-BE49-F238E27FC236}">
+                <a16:creationId xmlns:a16="http://schemas.microsoft.com/office/drawing/2014/main" id="{2BA5D557-FA23-7D34-7A47-D69858C64695}"/>
+              </a:ext>
+            </a:extLst>
+          </p:cNvPr>
+          <p:cNvSpPr txBox="1"/>
+          <p:nvPr/>
+        </p:nvSpPr>
+        <p:spPr>
+          <a:xfrm>
+            <a:off x="371094" y="2718054"/>
+            <a:ext cx="3438906" cy="3207258"/>
+          </a:xfrm>
+          <a:prstGeom prst="rect">
+            <a:avLst/>
+          </a:prstGeom>
+        </p:spPr>
+        <p:txBody>
+          <a:bodyPr vert="horz" lIns="91440" tIns="45720" rIns="91440" bIns="45720" rtlCol="0">
+            <a:normAutofit/>
+          </a:bodyPr>
+          <a:lstStyle/>
+          <a:p>
+            <a:pPr indent="-228600">
+              <a:lnSpc>
+                <a:spcPct val="90000"/>
+              </a:lnSpc>
+              <a:spcAft>
+                <a:spcPts val="600"/>
+              </a:spcAft>
+              <a:buFont typeface="Arial" panose="020B0604020202020204" pitchFamily="34" charset="0"/>
+              <a:buChar char="•"/>
+            </a:pPr>
+            <a:r>
+              <a:rPr lang="en-US" sz="1700" dirty="0"/>
+              <a:t>Solid line: SSW calculated response, which used: </a:t>
+            </a:r>
+          </a:p>
+          <a:p>
+            <a:pPr lvl="1" indent="-228600">
+              <a:lnSpc>
+                <a:spcPct val="90000"/>
+              </a:lnSpc>
+              <a:spcAft>
+                <a:spcPts val="600"/>
+              </a:spcAft>
+              <a:buFont typeface="Arial" panose="020B0604020202020204" pitchFamily="34" charset="0"/>
+              <a:buChar char="•"/>
+            </a:pPr>
+            <a:r>
+              <a:rPr lang="en-US" sz="1700" dirty="0"/>
+              <a:t>Chianti v-9</a:t>
+            </a:r>
+          </a:p>
+          <a:p>
+            <a:pPr lvl="1" indent="-228600">
+              <a:lnSpc>
+                <a:spcPct val="90000"/>
+              </a:lnSpc>
+              <a:spcAft>
+                <a:spcPts val="600"/>
+              </a:spcAft>
+              <a:buFont typeface="Arial" panose="020B0604020202020204" pitchFamily="34" charset="0"/>
+              <a:buChar char="•"/>
+            </a:pPr>
+            <a:r>
+              <a:rPr lang="en-US" sz="1700" dirty="0"/>
+              <a:t>Feldman coronal abundance</a:t>
+            </a:r>
+          </a:p>
+          <a:p>
+            <a:pPr marL="285750" indent="-228600">
+              <a:lnSpc>
+                <a:spcPct val="90000"/>
+              </a:lnSpc>
+              <a:spcAft>
+                <a:spcPts val="600"/>
+              </a:spcAft>
+              <a:buFont typeface="Arial" panose="020B0604020202020204" pitchFamily="34" charset="0"/>
+              <a:buChar char="•"/>
+            </a:pPr>
+            <a:endParaRPr lang="en-US" sz="1700" dirty="0"/>
+          </a:p>
+          <a:p>
+            <a:pPr marL="285750" indent="-228600">
+              <a:lnSpc>
+                <a:spcPct val="90000"/>
+              </a:lnSpc>
+              <a:spcAft>
+                <a:spcPts val="600"/>
+              </a:spcAft>
+              <a:buFont typeface="Arial" panose="020B0604020202020204" pitchFamily="34" charset="0"/>
+              <a:buChar char="•"/>
+            </a:pPr>
+            <a:endParaRPr lang="en-US" sz="1700" dirty="0"/>
+          </a:p>
+          <a:p>
+            <a:pPr marL="285750" indent="-228600">
+              <a:lnSpc>
+                <a:spcPct val="90000"/>
+              </a:lnSpc>
+              <a:spcAft>
+                <a:spcPts val="600"/>
+              </a:spcAft>
+              <a:buFont typeface="Arial" panose="020B0604020202020204" pitchFamily="34" charset="0"/>
+              <a:buChar char="•"/>
+            </a:pPr>
+            <a:endParaRPr lang="en-US" sz="1700" dirty="0"/>
+          </a:p>
+        </p:txBody>
+      </p:sp>
       <p:pic>
         <p:nvPicPr>
-          <p:cNvPr id="10" name="Picture 9">
-            <a:extLst>
-              <a:ext uri="{FF2B5EF4-FFF2-40B4-BE49-F238E27FC236}">
-                <a16:creationId xmlns:a16="http://schemas.microsoft.com/office/drawing/2014/main" id="{75CC3501-053E-DE7A-F119-C75D95208475}"/>
+          <p:cNvPr id="2" name="Picture 1">
+            <a:extLst>
+              <a:ext uri="{FF2B5EF4-FFF2-40B4-BE49-F238E27FC236}">
+                <a16:creationId xmlns:a16="http://schemas.microsoft.com/office/drawing/2014/main" id="{3817E333-8529-8209-2033-9FACA069BE03}"/>
               </a:ext>
             </a:extLst>
           </p:cNvPr>
@@ -7430,8 +7751,8 @@
         </p:blipFill>
         <p:spPr>
           <a:xfrm>
-            <a:off x="4901184" y="883539"/>
-            <a:ext cx="6922008" cy="5191505"/>
+            <a:off x="4901184" y="1004675"/>
+            <a:ext cx="6922008" cy="4949233"/>
           </a:xfrm>
           <a:prstGeom prst="rect">
             <a:avLst/>
@@ -7440,10 +7761,10 @@
       </p:pic>
       <p:sp>
         <p:nvSpPr>
-          <p:cNvPr id="11" name="TextBox 10">
-            <a:extLst>
-              <a:ext uri="{FF2B5EF4-FFF2-40B4-BE49-F238E27FC236}">
-                <a16:creationId xmlns:a16="http://schemas.microsoft.com/office/drawing/2014/main" id="{2BA5D557-FA23-7D34-7A47-D69858C64695}"/>
+          <p:cNvPr id="3" name="TextBox 2">
+            <a:extLst>
+              <a:ext uri="{FF2B5EF4-FFF2-40B4-BE49-F238E27FC236}">
+                <a16:creationId xmlns:a16="http://schemas.microsoft.com/office/drawing/2014/main" id="{190B403E-4D79-BC6E-57B2-4D32411A06AB}"/>
               </a:ext>
             </a:extLst>
           </p:cNvPr>
@@ -7452,104 +7773,24 @@
         </p:nvSpPr>
         <p:spPr>
           <a:xfrm>
-            <a:off x="371094" y="2718054"/>
-            <a:ext cx="3438906" cy="3207258"/>
+            <a:off x="368808" y="5910094"/>
+            <a:ext cx="2549609" cy="369332"/>
           </a:xfrm>
           <a:prstGeom prst="rect">
             <a:avLst/>
           </a:prstGeom>
+          <a:noFill/>
         </p:spPr>
         <p:txBody>
-          <a:bodyPr vert="horz" lIns="91440" tIns="45720" rIns="91440" bIns="45720" rtlCol="0">
-            <a:normAutofit/>
+          <a:bodyPr wrap="none" rtlCol="0">
+            <a:spAutoFit/>
           </a:bodyPr>
           <a:lstStyle/>
           <a:p>
-            <a:pPr indent="-228600">
-              <a:lnSpc>
-                <a:spcPct val="90000"/>
-              </a:lnSpc>
-              <a:spcAft>
-                <a:spcPts val="600"/>
-              </a:spcAft>
-              <a:buFont typeface="Arial" panose="020B0604020202020204" pitchFamily="34" charset="0"/>
-              <a:buChar char="•"/>
-            </a:pPr>
-            <a:r>
-              <a:rPr lang="en-US" sz="1700" dirty="0"/>
-              <a:t>Solid line: SSW calculated response, which used: </a:t>
-            </a:r>
-          </a:p>
-          <a:p>
-            <a:pPr lvl="1" indent="-228600">
-              <a:lnSpc>
-                <a:spcPct val="90000"/>
-              </a:lnSpc>
-              <a:spcAft>
-                <a:spcPts val="600"/>
-              </a:spcAft>
-              <a:buFont typeface="Arial" panose="020B0604020202020204" pitchFamily="34" charset="0"/>
-              <a:buChar char="•"/>
-            </a:pPr>
-            <a:r>
-              <a:rPr lang="en-US" sz="1700" dirty="0"/>
-              <a:t>Chianti v-9</a:t>
-            </a:r>
-          </a:p>
-          <a:p>
-            <a:pPr lvl="1" indent="-228600">
-              <a:lnSpc>
-                <a:spcPct val="90000"/>
-              </a:lnSpc>
-              <a:spcAft>
-                <a:spcPts val="600"/>
-              </a:spcAft>
-              <a:buFont typeface="Arial" panose="020B0604020202020204" pitchFamily="34" charset="0"/>
-              <a:buChar char="•"/>
-            </a:pPr>
-            <a:r>
-              <a:rPr lang="en-US" sz="1700" dirty="0"/>
-              <a:t>Feldman coronal abundance</a:t>
-            </a:r>
-          </a:p>
-          <a:p>
-            <a:pPr marL="285750" indent="-228600">
-              <a:lnSpc>
-                <a:spcPct val="90000"/>
-              </a:lnSpc>
-              <a:spcAft>
-                <a:spcPts val="600"/>
-              </a:spcAft>
-              <a:buFont typeface="Arial" panose="020B0604020202020204" pitchFamily="34" charset="0"/>
-              <a:buChar char="•"/>
-            </a:pPr>
-            <a:endParaRPr lang="en-US" sz="1700" dirty="0"/>
-          </a:p>
-          <a:p>
-            <a:pPr marL="285750" indent="-228600">
-              <a:lnSpc>
-                <a:spcPct val="90000"/>
-              </a:lnSpc>
-              <a:spcAft>
-                <a:spcPts val="600"/>
-              </a:spcAft>
-              <a:buFont typeface="Arial" panose="020B0604020202020204" pitchFamily="34" charset="0"/>
-              <a:buChar char="•"/>
-            </a:pPr>
-            <a:endParaRPr lang="en-US" sz="1700" dirty="0"/>
-          </a:p>
-          <a:p>
-            <a:pPr marL="285750" indent="-228600">
-              <a:lnSpc>
-                <a:spcPct val="90000"/>
-              </a:lnSpc>
-              <a:spcAft>
-                <a:spcPts val="600"/>
-              </a:spcAft>
-              <a:buFont typeface="Arial" panose="020B0604020202020204" pitchFamily="34" charset="0"/>
-              <a:buChar char="•"/>
-            </a:pPr>
-            <a:endParaRPr lang="en-US" sz="1700" dirty="0"/>
+            <a:r>
+              <a:rPr lang="en-US" dirty="0"/>
+              <a:t>Overall good agreement</a:t>
+            </a:r>
           </a:p>
         </p:txBody>
       </p:sp>
@@ -7599,7 +7840,7 @@
       </p:grpSpPr>
       <p:sp useBgFill="1">
         <p:nvSpPr>
-          <p:cNvPr id="12" name="Rectangle 11">
+          <p:cNvPr id="25" name="Rectangle 24">
             <a:extLst>
               <a:ext uri="{FF2B5EF4-FFF2-40B4-BE49-F238E27FC236}">
                 <a16:creationId xmlns:a16="http://schemas.microsoft.com/office/drawing/2014/main" id="{0288C6B4-AFC3-407F-A595-EFFD38D4CCAF}"/>
@@ -7659,7 +7900,7 @@
       </p:sp>
       <p:sp useBgFill="1">
         <p:nvSpPr>
-          <p:cNvPr id="14" name="Freeform: Shape 13">
+          <p:cNvPr id="27" name="Freeform: Shape 26">
             <a:extLst>
               <a:ext uri="{FF2B5EF4-FFF2-40B4-BE49-F238E27FC236}">
                 <a16:creationId xmlns:a16="http://schemas.microsoft.com/office/drawing/2014/main" id="{CF236821-17FE-429B-8D2C-08E13A64EA40}"/>
@@ -7831,7 +8072,7 @@
       </p:sp>
       <p:sp useBgFill="1">
         <p:nvSpPr>
-          <p:cNvPr id="16" name="Freeform: Shape 15">
+          <p:cNvPr id="29" name="Freeform: Shape 28">
             <a:extLst>
               <a:ext uri="{FF2B5EF4-FFF2-40B4-BE49-F238E27FC236}">
                 <a16:creationId xmlns:a16="http://schemas.microsoft.com/office/drawing/2014/main" id="{C0BDBCD2-E081-43AB-9119-C55465E59757}"/>
@@ -8046,7 +8287,7 @@
       </p:sp>
       <p:sp>
         <p:nvSpPr>
-          <p:cNvPr id="18" name="Rectangle 17">
+          <p:cNvPr id="31" name="Rectangle 30">
             <a:extLst>
               <a:ext uri="{FF2B5EF4-FFF2-40B4-BE49-F238E27FC236}">
                 <a16:creationId xmlns:a16="http://schemas.microsoft.com/office/drawing/2014/main" id="{98E79BE4-34FE-485A-98A5-92CE8F7C4743}"/>
@@ -8114,7 +8355,7 @@
       </p:sp>
       <p:sp>
         <p:nvSpPr>
-          <p:cNvPr id="20" name="Rectangle 19">
+          <p:cNvPr id="33" name="Rectangle 32">
             <a:extLst>
               <a:ext uri="{FF2B5EF4-FFF2-40B4-BE49-F238E27FC236}">
                 <a16:creationId xmlns:a16="http://schemas.microsoft.com/office/drawing/2014/main" id="{7A5F0580-5EE9-419F-96EE-B6529EF6E7D0}"/>
@@ -8205,12 +8446,127 @@
           </a:p>
         </p:txBody>
       </p:sp>
+      <p:sp>
+        <p:nvSpPr>
+          <p:cNvPr id="8" name="TextBox 7">
+            <a:extLst>
+              <a:ext uri="{FF2B5EF4-FFF2-40B4-BE49-F238E27FC236}">
+                <a16:creationId xmlns:a16="http://schemas.microsoft.com/office/drawing/2014/main" id="{33078D77-53F5-5060-0835-721F0633FA09}"/>
+              </a:ext>
+            </a:extLst>
+          </p:cNvPr>
+          <p:cNvSpPr txBox="1"/>
+          <p:nvPr/>
+        </p:nvSpPr>
+        <p:spPr>
+          <a:xfrm>
+            <a:off x="371094" y="2718054"/>
+            <a:ext cx="3438906" cy="3207258"/>
+          </a:xfrm>
+          <a:prstGeom prst="rect">
+            <a:avLst/>
+          </a:prstGeom>
+        </p:spPr>
+        <p:txBody>
+          <a:bodyPr vert="horz" lIns="91440" tIns="45720" rIns="91440" bIns="45720" rtlCol="0">
+            <a:normAutofit/>
+          </a:bodyPr>
+          <a:lstStyle/>
+          <a:p>
+            <a:pPr indent="-228600">
+              <a:lnSpc>
+                <a:spcPct val="90000"/>
+              </a:lnSpc>
+              <a:spcAft>
+                <a:spcPts val="600"/>
+              </a:spcAft>
+              <a:buFont typeface="Arial" panose="020B0604020202020204" pitchFamily="34" charset="0"/>
+              <a:buChar char="•"/>
+            </a:pPr>
+            <a:r>
+              <a:rPr lang="en-US" sz="1700" dirty="0"/>
+              <a:t>Solid line: SSW calculated response, which used: </a:t>
+            </a:r>
+          </a:p>
+          <a:p>
+            <a:pPr lvl="1" indent="-228600">
+              <a:lnSpc>
+                <a:spcPct val="90000"/>
+              </a:lnSpc>
+              <a:spcAft>
+                <a:spcPts val="600"/>
+              </a:spcAft>
+              <a:buFont typeface="Arial" panose="020B0604020202020204" pitchFamily="34" charset="0"/>
+              <a:buChar char="•"/>
+            </a:pPr>
+            <a:r>
+              <a:rPr lang="en-US" sz="1700" dirty="0"/>
+              <a:t>Chianti v-9</a:t>
+            </a:r>
+          </a:p>
+          <a:p>
+            <a:pPr lvl="1" indent="-228600">
+              <a:lnSpc>
+                <a:spcPct val="90000"/>
+              </a:lnSpc>
+              <a:spcAft>
+                <a:spcPts val="600"/>
+              </a:spcAft>
+              <a:buFont typeface="Arial" panose="020B0604020202020204" pitchFamily="34" charset="0"/>
+              <a:buChar char="•"/>
+            </a:pPr>
+            <a:r>
+              <a:rPr lang="en-US" sz="1700" dirty="0"/>
+              <a:t>Feldman coronal abundance</a:t>
+            </a:r>
+          </a:p>
+          <a:p>
+            <a:pPr marL="285750" indent="-228600">
+              <a:lnSpc>
+                <a:spcPct val="90000"/>
+              </a:lnSpc>
+              <a:spcAft>
+                <a:spcPts val="600"/>
+              </a:spcAft>
+              <a:buFont typeface="Arial" panose="020B0604020202020204" pitchFamily="34" charset="0"/>
+              <a:buChar char="•"/>
+            </a:pPr>
+            <a:endParaRPr lang="en-US" sz="1700" dirty="0"/>
+          </a:p>
+          <a:p>
+            <a:pPr marL="285750" indent="-228600">
+              <a:lnSpc>
+                <a:spcPct val="90000"/>
+              </a:lnSpc>
+              <a:spcAft>
+                <a:spcPts val="600"/>
+              </a:spcAft>
+              <a:buFont typeface="Arial" panose="020B0604020202020204" pitchFamily="34" charset="0"/>
+              <a:buChar char="•"/>
+            </a:pPr>
+            <a:endParaRPr lang="en-US" sz="1700" dirty="0"/>
+          </a:p>
+          <a:p>
+            <a:pPr marL="285750" indent="-228600">
+              <a:lnSpc>
+                <a:spcPct val="90000"/>
+              </a:lnSpc>
+              <a:spcAft>
+                <a:spcPts val="600"/>
+              </a:spcAft>
+              <a:buFont typeface="Arial" panose="020B0604020202020204" pitchFamily="34" charset="0"/>
+              <a:buChar char="•"/>
+            </a:pPr>
+            <a:endParaRPr lang="en-US" sz="1700" dirty="0"/>
+          </a:p>
+        </p:txBody>
+      </p:sp>
       <p:pic>
         <p:nvPicPr>
-          <p:cNvPr id="7" name="Picture 6">
-            <a:extLst>
-              <a:ext uri="{FF2B5EF4-FFF2-40B4-BE49-F238E27FC236}">
-                <a16:creationId xmlns:a16="http://schemas.microsoft.com/office/drawing/2014/main" id="{26E6DD97-8CB1-D4A3-D073-1F8ABE2FEC97}"/>
+          <p:cNvPr id="2" name="Picture 1">
+            <a:extLst>
+              <a:ext uri="{FF2B5EF4-FFF2-40B4-BE49-F238E27FC236}">
+                <a16:creationId xmlns:a16="http://schemas.microsoft.com/office/drawing/2014/main" id="{D572C0C6-85CA-E676-2F29-3EB675B34941}"/>
               </a:ext>
             </a:extLst>
           </p:cNvPr>
@@ -8227,8 +8583,8 @@
         </p:blipFill>
         <p:spPr>
           <a:xfrm>
-            <a:off x="4901184" y="883539"/>
-            <a:ext cx="6922008" cy="5191505"/>
+            <a:off x="4901184" y="1004675"/>
+            <a:ext cx="6922008" cy="4949233"/>
           </a:xfrm>
           <a:prstGeom prst="rect">
             <a:avLst/>
@@ -8237,10 +8593,10 @@
       </p:pic>
       <p:sp>
         <p:nvSpPr>
-          <p:cNvPr id="8" name="TextBox 7">
-            <a:extLst>
-              <a:ext uri="{FF2B5EF4-FFF2-40B4-BE49-F238E27FC236}">
-                <a16:creationId xmlns:a16="http://schemas.microsoft.com/office/drawing/2014/main" id="{33078D77-53F5-5060-0835-721F0633FA09}"/>
+          <p:cNvPr id="3" name="TextBox 2">
+            <a:extLst>
+              <a:ext uri="{FF2B5EF4-FFF2-40B4-BE49-F238E27FC236}">
+                <a16:creationId xmlns:a16="http://schemas.microsoft.com/office/drawing/2014/main" id="{E71042DC-A2FC-CFDB-91E5-E99B1F62622E}"/>
               </a:ext>
             </a:extLst>
           </p:cNvPr>
@@ -8249,104 +8605,30 @@
         </p:nvSpPr>
         <p:spPr>
           <a:xfrm>
-            <a:off x="371094" y="2718054"/>
-            <a:ext cx="3438906" cy="3207258"/>
+            <a:off x="439628" y="5696712"/>
+            <a:ext cx="5127237" cy="646331"/>
           </a:xfrm>
           <a:prstGeom prst="rect">
             <a:avLst/>
           </a:prstGeom>
+          <a:noFill/>
         </p:spPr>
         <p:txBody>
-          <a:bodyPr vert="horz" lIns="91440" tIns="45720" rIns="91440" bIns="45720" rtlCol="0">
-            <a:normAutofit/>
+          <a:bodyPr wrap="none" rtlCol="0">
+            <a:spAutoFit/>
           </a:bodyPr>
           <a:lstStyle/>
           <a:p>
-            <a:pPr indent="-228600">
-              <a:lnSpc>
-                <a:spcPct val="90000"/>
-              </a:lnSpc>
-              <a:spcAft>
-                <a:spcPts val="600"/>
-              </a:spcAft>
-              <a:buFont typeface="Arial" panose="020B0604020202020204" pitchFamily="34" charset="0"/>
-              <a:buChar char="•"/>
-            </a:pPr>
-            <a:r>
-              <a:rPr lang="en-US" sz="1700" dirty="0"/>
-              <a:t>Solid line: SSW calculated response, which used: </a:t>
-            </a:r>
-          </a:p>
-          <a:p>
-            <a:pPr lvl="1" indent="-228600">
-              <a:lnSpc>
-                <a:spcPct val="90000"/>
-              </a:lnSpc>
-              <a:spcAft>
-                <a:spcPts val="600"/>
-              </a:spcAft>
-              <a:buFont typeface="Arial" panose="020B0604020202020204" pitchFamily="34" charset="0"/>
-              <a:buChar char="•"/>
-            </a:pPr>
-            <a:r>
-              <a:rPr lang="en-US" sz="1700" dirty="0"/>
-              <a:t>Chianti v-9</a:t>
-            </a:r>
-          </a:p>
-          <a:p>
-            <a:pPr lvl="1" indent="-228600">
-              <a:lnSpc>
-                <a:spcPct val="90000"/>
-              </a:lnSpc>
-              <a:spcAft>
-                <a:spcPts val="600"/>
-              </a:spcAft>
-              <a:buFont typeface="Arial" panose="020B0604020202020204" pitchFamily="34" charset="0"/>
-              <a:buChar char="•"/>
-            </a:pPr>
-            <a:r>
-              <a:rPr lang="en-US" sz="1700" dirty="0"/>
-              <a:t>Feldman coronal abundance</a:t>
-            </a:r>
-          </a:p>
-          <a:p>
-            <a:pPr marL="285750" indent="-228600">
-              <a:lnSpc>
-                <a:spcPct val="90000"/>
-              </a:lnSpc>
-              <a:spcAft>
-                <a:spcPts val="600"/>
-              </a:spcAft>
-              <a:buFont typeface="Arial" panose="020B0604020202020204" pitchFamily="34" charset="0"/>
-              <a:buChar char="•"/>
-            </a:pPr>
-            <a:endParaRPr lang="en-US" sz="1700" dirty="0"/>
-          </a:p>
-          <a:p>
-            <a:pPr marL="285750" indent="-228600">
-              <a:lnSpc>
-                <a:spcPct val="90000"/>
-              </a:lnSpc>
-              <a:spcAft>
-                <a:spcPts val="600"/>
-              </a:spcAft>
-              <a:buFont typeface="Arial" panose="020B0604020202020204" pitchFamily="34" charset="0"/>
-              <a:buChar char="•"/>
-            </a:pPr>
-            <a:endParaRPr lang="en-US" sz="1700" dirty="0"/>
-          </a:p>
-          <a:p>
-            <a:pPr marL="285750" indent="-228600">
-              <a:lnSpc>
-                <a:spcPct val="90000"/>
-              </a:lnSpc>
-              <a:spcAft>
-                <a:spcPts val="600"/>
-              </a:spcAft>
-              <a:buFont typeface="Arial" panose="020B0604020202020204" pitchFamily="34" charset="0"/>
-              <a:buChar char="•"/>
-            </a:pPr>
-            <a:endParaRPr lang="en-US" sz="1700" dirty="0"/>
+            <a:r>
+              <a:rPr lang="en-US" dirty="0"/>
+              <a:t>This passband show significant deviation.</a:t>
+            </a:r>
+          </a:p>
+          <a:p>
+            <a:r>
+              <a:rPr lang="en-US" b="1" dirty="0"/>
+              <a:t>- Change of atomic data in new Chianti version?</a:t>
+            </a:r>
           </a:p>
         </p:txBody>
       </p:sp>
@@ -8396,7 +8678,7 @@
       </p:grpSpPr>
       <p:sp useBgFill="1">
         <p:nvSpPr>
-          <p:cNvPr id="13" name="Rectangle 12">
+          <p:cNvPr id="26" name="Rectangle 25">
             <a:extLst>
               <a:ext uri="{FF2B5EF4-FFF2-40B4-BE49-F238E27FC236}">
                 <a16:creationId xmlns:a16="http://schemas.microsoft.com/office/drawing/2014/main" id="{0288C6B4-AFC3-407F-A595-EFFD38D4CCAF}"/>
@@ -8456,7 +8738,7 @@
       </p:sp>
       <p:sp useBgFill="1">
         <p:nvSpPr>
-          <p:cNvPr id="15" name="Freeform: Shape 14">
+          <p:cNvPr id="28" name="Freeform: Shape 27">
             <a:extLst>
               <a:ext uri="{FF2B5EF4-FFF2-40B4-BE49-F238E27FC236}">
                 <a16:creationId xmlns:a16="http://schemas.microsoft.com/office/drawing/2014/main" id="{CF236821-17FE-429B-8D2C-08E13A64EA40}"/>
@@ -8628,7 +8910,7 @@
       </p:sp>
       <p:sp useBgFill="1">
         <p:nvSpPr>
-          <p:cNvPr id="17" name="Freeform: Shape 16">
+          <p:cNvPr id="30" name="Freeform: Shape 29">
             <a:extLst>
               <a:ext uri="{FF2B5EF4-FFF2-40B4-BE49-F238E27FC236}">
                 <a16:creationId xmlns:a16="http://schemas.microsoft.com/office/drawing/2014/main" id="{C0BDBCD2-E081-43AB-9119-C55465E59757}"/>
@@ -8843,7 +9125,7 @@
       </p:sp>
       <p:sp>
         <p:nvSpPr>
-          <p:cNvPr id="19" name="Rectangle 18">
+          <p:cNvPr id="32" name="Rectangle 31">
             <a:extLst>
               <a:ext uri="{FF2B5EF4-FFF2-40B4-BE49-F238E27FC236}">
                 <a16:creationId xmlns:a16="http://schemas.microsoft.com/office/drawing/2014/main" id="{98E79BE4-34FE-485A-98A5-92CE8F7C4743}"/>
@@ -8911,7 +9193,7 @@
       </p:sp>
       <p:sp>
         <p:nvSpPr>
-          <p:cNvPr id="21" name="Rectangle 20">
+          <p:cNvPr id="34" name="Rectangle 33">
             <a:extLst>
               <a:ext uri="{FF2B5EF4-FFF2-40B4-BE49-F238E27FC236}">
                 <a16:creationId xmlns:a16="http://schemas.microsoft.com/office/drawing/2014/main" id="{7A5F0580-5EE9-419F-96EE-B6529EF6E7D0}"/>
@@ -9002,12 +9284,127 @@
           </a:p>
         </p:txBody>
       </p:sp>
+      <p:sp>
+        <p:nvSpPr>
+          <p:cNvPr id="9" name="TextBox 8">
+            <a:extLst>
+              <a:ext uri="{FF2B5EF4-FFF2-40B4-BE49-F238E27FC236}">
+                <a16:creationId xmlns:a16="http://schemas.microsoft.com/office/drawing/2014/main" id="{523D487D-2A8D-A85F-7DEC-FF127A83D5F6}"/>
+              </a:ext>
+            </a:extLst>
+          </p:cNvPr>
+          <p:cNvSpPr txBox="1"/>
+          <p:nvPr/>
+        </p:nvSpPr>
+        <p:spPr>
+          <a:xfrm>
+            <a:off x="371094" y="2718054"/>
+            <a:ext cx="3438906" cy="3207258"/>
+          </a:xfrm>
+          <a:prstGeom prst="rect">
+            <a:avLst/>
+          </a:prstGeom>
+        </p:spPr>
+        <p:txBody>
+          <a:bodyPr vert="horz" lIns="91440" tIns="45720" rIns="91440" bIns="45720" rtlCol="0">
+            <a:normAutofit/>
+          </a:bodyPr>
+          <a:lstStyle/>
+          <a:p>
+            <a:pPr indent="-228600">
+              <a:lnSpc>
+                <a:spcPct val="90000"/>
+              </a:lnSpc>
+              <a:spcAft>
+                <a:spcPts val="600"/>
+              </a:spcAft>
+              <a:buFont typeface="Arial" panose="020B0604020202020204" pitchFamily="34" charset="0"/>
+              <a:buChar char="•"/>
+            </a:pPr>
+            <a:r>
+              <a:rPr lang="en-US" sz="1700" dirty="0"/>
+              <a:t>Solid line: SSW calculated response, which used: </a:t>
+            </a:r>
+          </a:p>
+          <a:p>
+            <a:pPr lvl="1" indent="-228600">
+              <a:lnSpc>
+                <a:spcPct val="90000"/>
+              </a:lnSpc>
+              <a:spcAft>
+                <a:spcPts val="600"/>
+              </a:spcAft>
+              <a:buFont typeface="Arial" panose="020B0604020202020204" pitchFamily="34" charset="0"/>
+              <a:buChar char="•"/>
+            </a:pPr>
+            <a:r>
+              <a:rPr lang="en-US" sz="1700" dirty="0"/>
+              <a:t>Chianti v-9</a:t>
+            </a:r>
+          </a:p>
+          <a:p>
+            <a:pPr lvl="1" indent="-228600">
+              <a:lnSpc>
+                <a:spcPct val="90000"/>
+              </a:lnSpc>
+              <a:spcAft>
+                <a:spcPts val="600"/>
+              </a:spcAft>
+              <a:buFont typeface="Arial" panose="020B0604020202020204" pitchFamily="34" charset="0"/>
+              <a:buChar char="•"/>
+            </a:pPr>
+            <a:r>
+              <a:rPr lang="en-US" sz="1700" dirty="0"/>
+              <a:t>Feldman coronal abundance</a:t>
+            </a:r>
+          </a:p>
+          <a:p>
+            <a:pPr marL="285750" indent="-228600">
+              <a:lnSpc>
+                <a:spcPct val="90000"/>
+              </a:lnSpc>
+              <a:spcAft>
+                <a:spcPts val="600"/>
+              </a:spcAft>
+              <a:buFont typeface="Arial" panose="020B0604020202020204" pitchFamily="34" charset="0"/>
+              <a:buChar char="•"/>
+            </a:pPr>
+            <a:endParaRPr lang="en-US" sz="1700" dirty="0"/>
+          </a:p>
+          <a:p>
+            <a:pPr marL="285750" indent="-228600">
+              <a:lnSpc>
+                <a:spcPct val="90000"/>
+              </a:lnSpc>
+              <a:spcAft>
+                <a:spcPts val="600"/>
+              </a:spcAft>
+              <a:buFont typeface="Arial" panose="020B0604020202020204" pitchFamily="34" charset="0"/>
+              <a:buChar char="•"/>
+            </a:pPr>
+            <a:endParaRPr lang="en-US" sz="1700" dirty="0"/>
+          </a:p>
+          <a:p>
+            <a:pPr marL="285750" indent="-228600">
+              <a:lnSpc>
+                <a:spcPct val="90000"/>
+              </a:lnSpc>
+              <a:spcAft>
+                <a:spcPts val="600"/>
+              </a:spcAft>
+              <a:buFont typeface="Arial" panose="020B0604020202020204" pitchFamily="34" charset="0"/>
+              <a:buChar char="•"/>
+            </a:pPr>
+            <a:endParaRPr lang="en-US" sz="1700" dirty="0"/>
+          </a:p>
+        </p:txBody>
+      </p:sp>
       <p:pic>
         <p:nvPicPr>
-          <p:cNvPr id="8" name="Picture 7">
-            <a:extLst>
-              <a:ext uri="{FF2B5EF4-FFF2-40B4-BE49-F238E27FC236}">
-                <a16:creationId xmlns:a16="http://schemas.microsoft.com/office/drawing/2014/main" id="{D2DAEAD8-50C2-21A9-D339-CB3C803592C0}"/>
+          <p:cNvPr id="2" name="Picture 1">
+            <a:extLst>
+              <a:ext uri="{FF2B5EF4-FFF2-40B4-BE49-F238E27FC236}">
+                <a16:creationId xmlns:a16="http://schemas.microsoft.com/office/drawing/2014/main" id="{12B3C454-C393-6C18-BC0D-08169FC613D0}"/>
               </a:ext>
             </a:extLst>
           </p:cNvPr>
@@ -9024,8 +9421,8 @@
         </p:blipFill>
         <p:spPr>
           <a:xfrm>
-            <a:off x="4901184" y="883539"/>
-            <a:ext cx="6922008" cy="5191505"/>
+            <a:off x="4901184" y="1004675"/>
+            <a:ext cx="6922008" cy="4949233"/>
           </a:xfrm>
           <a:prstGeom prst="rect">
             <a:avLst/>
@@ -9034,10 +9431,10 @@
       </p:pic>
       <p:sp>
         <p:nvSpPr>
-          <p:cNvPr id="9" name="TextBox 8">
-            <a:extLst>
-              <a:ext uri="{FF2B5EF4-FFF2-40B4-BE49-F238E27FC236}">
-                <a16:creationId xmlns:a16="http://schemas.microsoft.com/office/drawing/2014/main" id="{523D487D-2A8D-A85F-7DEC-FF127A83D5F6}"/>
+          <p:cNvPr id="3" name="TextBox 2">
+            <a:extLst>
+              <a:ext uri="{FF2B5EF4-FFF2-40B4-BE49-F238E27FC236}">
+                <a16:creationId xmlns:a16="http://schemas.microsoft.com/office/drawing/2014/main" id="{01E05E28-6183-8B23-4E92-E8D4A9456DDA}"/>
               </a:ext>
             </a:extLst>
           </p:cNvPr>
@@ -9046,104 +9443,24 @@
         </p:nvSpPr>
         <p:spPr>
           <a:xfrm>
-            <a:off x="371094" y="2718054"/>
-            <a:ext cx="3438906" cy="3207258"/>
+            <a:off x="368808" y="5910094"/>
+            <a:ext cx="2549609" cy="369332"/>
           </a:xfrm>
           <a:prstGeom prst="rect">
             <a:avLst/>
           </a:prstGeom>
+          <a:noFill/>
         </p:spPr>
         <p:txBody>
-          <a:bodyPr vert="horz" lIns="91440" tIns="45720" rIns="91440" bIns="45720" rtlCol="0">
-            <a:normAutofit/>
+          <a:bodyPr wrap="none" rtlCol="0">
+            <a:spAutoFit/>
           </a:bodyPr>
           <a:lstStyle/>
           <a:p>
-            <a:pPr indent="-228600">
-              <a:lnSpc>
-                <a:spcPct val="90000"/>
-              </a:lnSpc>
-              <a:spcAft>
-                <a:spcPts val="600"/>
-              </a:spcAft>
-              <a:buFont typeface="Arial" panose="020B0604020202020204" pitchFamily="34" charset="0"/>
-              <a:buChar char="•"/>
-            </a:pPr>
-            <a:r>
-              <a:rPr lang="en-US" sz="1700" dirty="0"/>
-              <a:t>Solid line: SSW calculated response, which used: </a:t>
-            </a:r>
-          </a:p>
-          <a:p>
-            <a:pPr lvl="1" indent="-228600">
-              <a:lnSpc>
-                <a:spcPct val="90000"/>
-              </a:lnSpc>
-              <a:spcAft>
-                <a:spcPts val="600"/>
-              </a:spcAft>
-              <a:buFont typeface="Arial" panose="020B0604020202020204" pitchFamily="34" charset="0"/>
-              <a:buChar char="•"/>
-            </a:pPr>
-            <a:r>
-              <a:rPr lang="en-US" sz="1700" dirty="0"/>
-              <a:t>Chianti v-9</a:t>
-            </a:r>
-          </a:p>
-          <a:p>
-            <a:pPr lvl="1" indent="-228600">
-              <a:lnSpc>
-                <a:spcPct val="90000"/>
-              </a:lnSpc>
-              <a:spcAft>
-                <a:spcPts val="600"/>
-              </a:spcAft>
-              <a:buFont typeface="Arial" panose="020B0604020202020204" pitchFamily="34" charset="0"/>
-              <a:buChar char="•"/>
-            </a:pPr>
-            <a:r>
-              <a:rPr lang="en-US" sz="1700" dirty="0"/>
-              <a:t>Feldman coronal abundance</a:t>
-            </a:r>
-          </a:p>
-          <a:p>
-            <a:pPr marL="285750" indent="-228600">
-              <a:lnSpc>
-                <a:spcPct val="90000"/>
-              </a:lnSpc>
-              <a:spcAft>
-                <a:spcPts val="600"/>
-              </a:spcAft>
-              <a:buFont typeface="Arial" panose="020B0604020202020204" pitchFamily="34" charset="0"/>
-              <a:buChar char="•"/>
-            </a:pPr>
-            <a:endParaRPr lang="en-US" sz="1700" dirty="0"/>
-          </a:p>
-          <a:p>
-            <a:pPr marL="285750" indent="-228600">
-              <a:lnSpc>
-                <a:spcPct val="90000"/>
-              </a:lnSpc>
-              <a:spcAft>
-                <a:spcPts val="600"/>
-              </a:spcAft>
-              <a:buFont typeface="Arial" panose="020B0604020202020204" pitchFamily="34" charset="0"/>
-              <a:buChar char="•"/>
-            </a:pPr>
-            <a:endParaRPr lang="en-US" sz="1700" dirty="0"/>
-          </a:p>
-          <a:p>
-            <a:pPr marL="285750" indent="-228600">
-              <a:lnSpc>
-                <a:spcPct val="90000"/>
-              </a:lnSpc>
-              <a:spcAft>
-                <a:spcPts val="600"/>
-              </a:spcAft>
-              <a:buFont typeface="Arial" panose="020B0604020202020204" pitchFamily="34" charset="0"/>
-              <a:buChar char="•"/>
-            </a:pPr>
-            <a:endParaRPr lang="en-US" sz="1700" dirty="0"/>
+            <a:r>
+              <a:rPr lang="en-US" dirty="0"/>
+              <a:t>Overall good agreement</a:t>
+            </a:r>
           </a:p>
         </p:txBody>
       </p:sp>

--- a/AIA_response_functions.pptx
+++ b/AIA_response_functions.pptx
@@ -266,7 +266,7 @@
           <a:p>
             <a:fld id="{7F93A7E9-2842-EB4A-A538-B6D599C0B0B0}" type="datetimeFigureOut">
               <a:rPr lang="en-US" smtClean="0"/>
-              <a:t>10/14/26</a:t>
+              <a:t>10/15/26</a:t>
             </a:fld>
             <a:endParaRPr lang="en-US"/>
           </a:p>
@@ -464,7 +464,7 @@
           <a:p>
             <a:fld id="{7F93A7E9-2842-EB4A-A538-B6D599C0B0B0}" type="datetimeFigureOut">
               <a:rPr lang="en-US" smtClean="0"/>
-              <a:t>10/14/26</a:t>
+              <a:t>10/15/26</a:t>
             </a:fld>
             <a:endParaRPr lang="en-US"/>
           </a:p>
@@ -672,7 +672,7 @@
           <a:p>
             <a:fld id="{7F93A7E9-2842-EB4A-A538-B6D599C0B0B0}" type="datetimeFigureOut">
               <a:rPr lang="en-US" smtClean="0"/>
-              <a:t>10/14/26</a:t>
+              <a:t>10/15/26</a:t>
             </a:fld>
             <a:endParaRPr lang="en-US"/>
           </a:p>
@@ -870,7 +870,7 @@
           <a:p>
             <a:fld id="{7F93A7E9-2842-EB4A-A538-B6D599C0B0B0}" type="datetimeFigureOut">
               <a:rPr lang="en-US" smtClean="0"/>
-              <a:t>10/14/26</a:t>
+              <a:t>10/15/26</a:t>
             </a:fld>
             <a:endParaRPr lang="en-US"/>
           </a:p>
@@ -1145,7 +1145,7 @@
           <a:p>
             <a:fld id="{7F93A7E9-2842-EB4A-A538-B6D599C0B0B0}" type="datetimeFigureOut">
               <a:rPr lang="en-US" smtClean="0"/>
-              <a:t>10/14/26</a:t>
+              <a:t>10/15/26</a:t>
             </a:fld>
             <a:endParaRPr lang="en-US"/>
           </a:p>
@@ -1410,7 +1410,7 @@
           <a:p>
             <a:fld id="{7F93A7E9-2842-EB4A-A538-B6D599C0B0B0}" type="datetimeFigureOut">
               <a:rPr lang="en-US" smtClean="0"/>
-              <a:t>10/14/26</a:t>
+              <a:t>10/15/26</a:t>
             </a:fld>
             <a:endParaRPr lang="en-US"/>
           </a:p>
@@ -1822,7 +1822,7 @@
           <a:p>
             <a:fld id="{7F93A7E9-2842-EB4A-A538-B6D599C0B0B0}" type="datetimeFigureOut">
               <a:rPr lang="en-US" smtClean="0"/>
-              <a:t>10/14/26</a:t>
+              <a:t>10/15/26</a:t>
             </a:fld>
             <a:endParaRPr lang="en-US"/>
           </a:p>
@@ -1963,7 +1963,7 @@
           <a:p>
             <a:fld id="{7F93A7E9-2842-EB4A-A538-B6D599C0B0B0}" type="datetimeFigureOut">
               <a:rPr lang="en-US" smtClean="0"/>
-              <a:t>10/14/26</a:t>
+              <a:t>10/15/26</a:t>
             </a:fld>
             <a:endParaRPr lang="en-US"/>
           </a:p>
@@ -2076,7 +2076,7 @@
           <a:p>
             <a:fld id="{7F93A7E9-2842-EB4A-A538-B6D599C0B0B0}" type="datetimeFigureOut">
               <a:rPr lang="en-US" smtClean="0"/>
-              <a:t>10/14/26</a:t>
+              <a:t>10/15/26</a:t>
             </a:fld>
             <a:endParaRPr lang="en-US"/>
           </a:p>
@@ -2387,7 +2387,7 @@
           <a:p>
             <a:fld id="{7F93A7E9-2842-EB4A-A538-B6D599C0B0B0}" type="datetimeFigureOut">
               <a:rPr lang="en-US" smtClean="0"/>
-              <a:t>10/14/26</a:t>
+              <a:t>10/15/26</a:t>
             </a:fld>
             <a:endParaRPr lang="en-US"/>
           </a:p>
@@ -2675,7 +2675,7 @@
           <a:p>
             <a:fld id="{7F93A7E9-2842-EB4A-A538-B6D599C0B0B0}" type="datetimeFigureOut">
               <a:rPr lang="en-US" smtClean="0"/>
-              <a:t>10/14/26</a:t>
+              <a:t>10/15/26</a:t>
             </a:fld>
             <a:endParaRPr lang="en-US"/>
           </a:p>
@@ -2916,7 +2916,7 @@
           <a:p>
             <a:fld id="{7F93A7E9-2842-EB4A-A538-B6D599C0B0B0}" type="datetimeFigureOut">
               <a:rPr lang="en-US" smtClean="0"/>
-              <a:t>10/14/26</a:t>
+              <a:t>10/15/26</a:t>
             </a:fld>
             <a:endParaRPr lang="en-US"/>
           </a:p>
@@ -3383,7 +3383,7 @@
         <p:spPr>
           <a:xfrm>
             <a:off x="3355987" y="1935125"/>
-            <a:ext cx="6304546" cy="3279552"/>
+            <a:ext cx="5480026" cy="3279552"/>
           </a:xfrm>
           <a:prstGeom prst="rect">
             <a:avLst/>
@@ -3432,29 +3432,7 @@
                   </a:schemeClr>
                 </a:solidFill>
               </a:rPr>
-              <a:t>AIA effective area version: 10 (applied /</a:t>
-            </a:r>
-            <a:r>
-              <a:rPr lang="en-US" sz="2000" dirty="0" err="1">
-                <a:solidFill>
-                  <a:schemeClr val="tx2">
-                    <a:lumMod val="50000"/>
-                    <a:lumOff val="50000"/>
-                  </a:schemeClr>
-                </a:solidFill>
-              </a:rPr>
-              <a:t>evenorm</a:t>
-            </a:r>
-            <a:r>
-              <a:rPr lang="en-US" sz="2000" dirty="0">
-                <a:solidFill>
-                  <a:schemeClr val="tx2">
-                    <a:lumMod val="50000"/>
-                    <a:lumOff val="50000"/>
-                  </a:schemeClr>
-                </a:solidFill>
-              </a:rPr>
-              <a:t>, /dn)</a:t>
+              <a:t>AIA effective area version: 10 (applied /dn)</a:t>
             </a:r>
           </a:p>
           <a:p>
@@ -4371,12 +4349,77 @@
           </a:p>
         </p:txBody>
       </p:sp>
+      <p:sp>
+        <p:nvSpPr>
+          <p:cNvPr id="3" name="TextBox 2">
+            <a:extLst>
+              <a:ext uri="{FF2B5EF4-FFF2-40B4-BE49-F238E27FC236}">
+                <a16:creationId xmlns:a16="http://schemas.microsoft.com/office/drawing/2014/main" id="{2B51519B-DA03-D430-C683-78276503646A}"/>
+              </a:ext>
+            </a:extLst>
+          </p:cNvPr>
+          <p:cNvSpPr txBox="1"/>
+          <p:nvPr/>
+        </p:nvSpPr>
+        <p:spPr>
+          <a:xfrm>
+            <a:off x="368808" y="5910094"/>
+            <a:ext cx="11521937" cy="646331"/>
+          </a:xfrm>
+          <a:prstGeom prst="rect">
+            <a:avLst/>
+          </a:prstGeom>
+          <a:noFill/>
+        </p:spPr>
+        <p:txBody>
+          <a:bodyPr wrap="none" rtlCol="0">
+            <a:spAutoFit/>
+          </a:bodyPr>
+          <a:lstStyle/>
+          <a:p>
+            <a:r>
+              <a:rPr lang="en-US" dirty="0"/>
+              <a:t>This passband show significant deviation in between 6.0&lt; </a:t>
+            </a:r>
+            <a:r>
+              <a:rPr lang="en-US" dirty="0" err="1"/>
+              <a:t>logT</a:t>
+            </a:r>
+            <a:r>
+              <a:rPr lang="en-US" dirty="0"/>
+              <a:t> &lt; 6.5 .</a:t>
+            </a:r>
+          </a:p>
+          <a:p>
+            <a:r>
+              <a:rPr lang="en-US" b="1" dirty="0"/>
+              <a:t>- Change of atomic data in new Chianti version or the effect of ‘</a:t>
+            </a:r>
+            <a:r>
+              <a:rPr lang="en-US" b="1" dirty="0" err="1"/>
+              <a:t>chiantifix</a:t>
+            </a:r>
+            <a:r>
+              <a:rPr lang="en-US" b="1" dirty="0"/>
+              <a:t>’ analytical factor in </a:t>
+            </a:r>
+            <a:r>
+              <a:rPr lang="en-US" b="1" dirty="0" err="1"/>
+              <a:t>ssw</a:t>
+            </a:r>
+            <a:r>
+              <a:rPr lang="en-US" b="1" dirty="0"/>
+              <a:t> calculation?</a:t>
+            </a:r>
+          </a:p>
+        </p:txBody>
+      </p:sp>
       <p:pic>
         <p:nvPicPr>
-          <p:cNvPr id="2" name="Picture 1">
-            <a:extLst>
-              <a:ext uri="{FF2B5EF4-FFF2-40B4-BE49-F238E27FC236}">
-                <a16:creationId xmlns:a16="http://schemas.microsoft.com/office/drawing/2014/main" id="{F73A4AAE-BF62-1E5E-D626-8493E060FB51}"/>
+          <p:cNvPr id="4" name="Picture 3">
+            <a:extLst>
+              <a:ext uri="{FF2B5EF4-FFF2-40B4-BE49-F238E27FC236}">
+                <a16:creationId xmlns:a16="http://schemas.microsoft.com/office/drawing/2014/main" id="{ACFA4C4F-BE08-9814-5766-A778E4525C35}"/>
               </a:ext>
             </a:extLst>
           </p:cNvPr>
@@ -4393,79 +4436,14 @@
         </p:blipFill>
         <p:spPr>
           <a:xfrm>
-            <a:off x="4901184" y="1004675"/>
-            <a:ext cx="6922008" cy="4949233"/>
+            <a:off x="4968906" y="954383"/>
+            <a:ext cx="6921839" cy="4949233"/>
           </a:xfrm>
           <a:prstGeom prst="rect">
             <a:avLst/>
           </a:prstGeom>
         </p:spPr>
       </p:pic>
-      <p:sp>
-        <p:nvSpPr>
-          <p:cNvPr id="3" name="TextBox 2">
-            <a:extLst>
-              <a:ext uri="{FF2B5EF4-FFF2-40B4-BE49-F238E27FC236}">
-                <a16:creationId xmlns:a16="http://schemas.microsoft.com/office/drawing/2014/main" id="{2B51519B-DA03-D430-C683-78276503646A}"/>
-              </a:ext>
-            </a:extLst>
-          </p:cNvPr>
-          <p:cNvSpPr txBox="1"/>
-          <p:nvPr/>
-        </p:nvSpPr>
-        <p:spPr>
-          <a:xfrm>
-            <a:off x="368808" y="5910094"/>
-            <a:ext cx="11521937" cy="646331"/>
-          </a:xfrm>
-          <a:prstGeom prst="rect">
-            <a:avLst/>
-          </a:prstGeom>
-          <a:noFill/>
-        </p:spPr>
-        <p:txBody>
-          <a:bodyPr wrap="none" rtlCol="0">
-            <a:spAutoFit/>
-          </a:bodyPr>
-          <a:lstStyle/>
-          <a:p>
-            <a:r>
-              <a:rPr lang="en-US" dirty="0"/>
-              <a:t>This passband show significant deviation in between 6.0&lt; </a:t>
-            </a:r>
-            <a:r>
-              <a:rPr lang="en-US" dirty="0" err="1"/>
-              <a:t>logT</a:t>
-            </a:r>
-            <a:r>
-              <a:rPr lang="en-US" dirty="0"/>
-              <a:t> &lt; 6.5 .</a:t>
-            </a:r>
-          </a:p>
-          <a:p>
-            <a:r>
-              <a:rPr lang="en-US" b="1" dirty="0"/>
-              <a:t>- Change of atomic data in new Chianti version or the effect of ‘</a:t>
-            </a:r>
-            <a:r>
-              <a:rPr lang="en-US" b="1" dirty="0" err="1"/>
-              <a:t>chiantifix</a:t>
-            </a:r>
-            <a:r>
-              <a:rPr lang="en-US" b="1" dirty="0"/>
-              <a:t>’ analytical factor in </a:t>
-            </a:r>
-            <a:r>
-              <a:rPr lang="en-US" b="1" dirty="0" err="1"/>
-              <a:t>ssw</a:t>
-            </a:r>
-            <a:r>
-              <a:rPr lang="en-US" b="1" dirty="0"/>
-              <a:t> calculation?</a:t>
-            </a:r>
-          </a:p>
-        </p:txBody>
-      </p:sp>
     </p:spTree>
     <p:extLst>
       <p:ext uri="{BB962C8B-B14F-4D97-AF65-F5344CB8AC3E}">
@@ -5233,12 +5211,47 @@
           </a:p>
         </p:txBody>
       </p:sp>
+      <p:sp>
+        <p:nvSpPr>
+          <p:cNvPr id="3" name="TextBox 2">
+            <a:extLst>
+              <a:ext uri="{FF2B5EF4-FFF2-40B4-BE49-F238E27FC236}">
+                <a16:creationId xmlns:a16="http://schemas.microsoft.com/office/drawing/2014/main" id="{DB50A09B-A667-2C93-CAF7-7AFF4DA57E60}"/>
+              </a:ext>
+            </a:extLst>
+          </p:cNvPr>
+          <p:cNvSpPr txBox="1"/>
+          <p:nvPr/>
+        </p:nvSpPr>
+        <p:spPr>
+          <a:xfrm>
+            <a:off x="368808" y="5910094"/>
+            <a:ext cx="2549609" cy="369332"/>
+          </a:xfrm>
+          <a:prstGeom prst="rect">
+            <a:avLst/>
+          </a:prstGeom>
+          <a:noFill/>
+        </p:spPr>
+        <p:txBody>
+          <a:bodyPr wrap="none" rtlCol="0">
+            <a:spAutoFit/>
+          </a:bodyPr>
+          <a:lstStyle/>
+          <a:p>
+            <a:r>
+              <a:rPr lang="en-US" dirty="0"/>
+              <a:t>Overall good agreement</a:t>
+            </a:r>
+          </a:p>
+        </p:txBody>
+      </p:sp>
       <p:pic>
         <p:nvPicPr>
-          <p:cNvPr id="2" name="Picture 1">
-            <a:extLst>
-              <a:ext uri="{FF2B5EF4-FFF2-40B4-BE49-F238E27FC236}">
-                <a16:creationId xmlns:a16="http://schemas.microsoft.com/office/drawing/2014/main" id="{2EA15CC5-2B15-02B3-9943-E5F05F68ADED}"/>
+          <p:cNvPr id="4" name="Picture 3">
+            <a:extLst>
+              <a:ext uri="{FF2B5EF4-FFF2-40B4-BE49-F238E27FC236}">
+                <a16:creationId xmlns:a16="http://schemas.microsoft.com/office/drawing/2014/main" id="{3C967C69-FD31-D46F-BADC-C8379F5942E7}"/>
               </a:ext>
             </a:extLst>
           </p:cNvPr>
@@ -5255,49 +5268,14 @@
         </p:blipFill>
         <p:spPr>
           <a:xfrm>
-            <a:off x="4901184" y="1004675"/>
-            <a:ext cx="6922008" cy="4949233"/>
+            <a:off x="4874267" y="1004674"/>
+            <a:ext cx="6921840" cy="4949234"/>
           </a:xfrm>
           <a:prstGeom prst="rect">
             <a:avLst/>
           </a:prstGeom>
         </p:spPr>
       </p:pic>
-      <p:sp>
-        <p:nvSpPr>
-          <p:cNvPr id="3" name="TextBox 2">
-            <a:extLst>
-              <a:ext uri="{FF2B5EF4-FFF2-40B4-BE49-F238E27FC236}">
-                <a16:creationId xmlns:a16="http://schemas.microsoft.com/office/drawing/2014/main" id="{DB50A09B-A667-2C93-CAF7-7AFF4DA57E60}"/>
-              </a:ext>
-            </a:extLst>
-          </p:cNvPr>
-          <p:cNvSpPr txBox="1"/>
-          <p:nvPr/>
-        </p:nvSpPr>
-        <p:spPr>
-          <a:xfrm>
-            <a:off x="368808" y="5910094"/>
-            <a:ext cx="2549609" cy="369332"/>
-          </a:xfrm>
-          <a:prstGeom prst="rect">
-            <a:avLst/>
-          </a:prstGeom>
-          <a:noFill/>
-        </p:spPr>
-        <p:txBody>
-          <a:bodyPr wrap="none" rtlCol="0">
-            <a:spAutoFit/>
-          </a:bodyPr>
-          <a:lstStyle/>
-          <a:p>
-            <a:r>
-              <a:rPr lang="en-US" dirty="0"/>
-              <a:t>Overall good agreement</a:t>
-            </a:r>
-          </a:p>
-        </p:txBody>
-      </p:sp>
     </p:spTree>
     <p:extLst>
       <p:ext uri="{BB962C8B-B14F-4D97-AF65-F5344CB8AC3E}">
@@ -6065,12 +6043,47 @@
           </a:p>
         </p:txBody>
       </p:sp>
+      <p:sp>
+        <p:nvSpPr>
+          <p:cNvPr id="3" name="TextBox 2">
+            <a:extLst>
+              <a:ext uri="{FF2B5EF4-FFF2-40B4-BE49-F238E27FC236}">
+                <a16:creationId xmlns:a16="http://schemas.microsoft.com/office/drawing/2014/main" id="{35816EF0-CADF-3D00-F844-2A2C47756716}"/>
+              </a:ext>
+            </a:extLst>
+          </p:cNvPr>
+          <p:cNvSpPr txBox="1"/>
+          <p:nvPr/>
+        </p:nvSpPr>
+        <p:spPr>
+          <a:xfrm>
+            <a:off x="368808" y="5910094"/>
+            <a:ext cx="2549609" cy="369332"/>
+          </a:xfrm>
+          <a:prstGeom prst="rect">
+            <a:avLst/>
+          </a:prstGeom>
+          <a:noFill/>
+        </p:spPr>
+        <p:txBody>
+          <a:bodyPr wrap="none" rtlCol="0">
+            <a:spAutoFit/>
+          </a:bodyPr>
+          <a:lstStyle/>
+          <a:p>
+            <a:r>
+              <a:rPr lang="en-US" dirty="0"/>
+              <a:t>Overall good agreement</a:t>
+            </a:r>
+          </a:p>
+        </p:txBody>
+      </p:sp>
       <p:pic>
         <p:nvPicPr>
-          <p:cNvPr id="2" name="Picture 1">
-            <a:extLst>
-              <a:ext uri="{FF2B5EF4-FFF2-40B4-BE49-F238E27FC236}">
-                <a16:creationId xmlns:a16="http://schemas.microsoft.com/office/drawing/2014/main" id="{FA0018A7-4CCB-82A8-08AA-1AECC0DD5F05}"/>
+          <p:cNvPr id="4" name="Picture 3">
+            <a:extLst>
+              <a:ext uri="{FF2B5EF4-FFF2-40B4-BE49-F238E27FC236}">
+                <a16:creationId xmlns:a16="http://schemas.microsoft.com/office/drawing/2014/main" id="{9E91A48A-237E-7EE1-DBEF-9173A4256464}"/>
               </a:ext>
             </a:extLst>
           </p:cNvPr>
@@ -6087,49 +6100,14 @@
         </p:blipFill>
         <p:spPr>
           <a:xfrm>
-            <a:off x="4901184" y="1004675"/>
-            <a:ext cx="6922008" cy="4949233"/>
+            <a:off x="4874267" y="1023596"/>
+            <a:ext cx="6921840" cy="4949233"/>
           </a:xfrm>
           <a:prstGeom prst="rect">
             <a:avLst/>
           </a:prstGeom>
         </p:spPr>
       </p:pic>
-      <p:sp>
-        <p:nvSpPr>
-          <p:cNvPr id="3" name="TextBox 2">
-            <a:extLst>
-              <a:ext uri="{FF2B5EF4-FFF2-40B4-BE49-F238E27FC236}">
-                <a16:creationId xmlns:a16="http://schemas.microsoft.com/office/drawing/2014/main" id="{35816EF0-CADF-3D00-F844-2A2C47756716}"/>
-              </a:ext>
-            </a:extLst>
-          </p:cNvPr>
-          <p:cNvSpPr txBox="1"/>
-          <p:nvPr/>
-        </p:nvSpPr>
-        <p:spPr>
-          <a:xfrm>
-            <a:off x="368808" y="5910094"/>
-            <a:ext cx="2549609" cy="369332"/>
-          </a:xfrm>
-          <a:prstGeom prst="rect">
-            <a:avLst/>
-          </a:prstGeom>
-          <a:noFill/>
-        </p:spPr>
-        <p:txBody>
-          <a:bodyPr wrap="none" rtlCol="0">
-            <a:spAutoFit/>
-          </a:bodyPr>
-          <a:lstStyle/>
-          <a:p>
-            <a:r>
-              <a:rPr lang="en-US" dirty="0"/>
-              <a:t>Overall good agreement</a:t>
-            </a:r>
-          </a:p>
-        </p:txBody>
-      </p:sp>
     </p:spTree>
     <p:extLst>
       <p:ext uri="{BB962C8B-B14F-4D97-AF65-F5344CB8AC3E}">
@@ -6897,12 +6875,47 @@
           </a:p>
         </p:txBody>
       </p:sp>
+      <p:sp>
+        <p:nvSpPr>
+          <p:cNvPr id="3" name="TextBox 2">
+            <a:extLst>
+              <a:ext uri="{FF2B5EF4-FFF2-40B4-BE49-F238E27FC236}">
+                <a16:creationId xmlns:a16="http://schemas.microsoft.com/office/drawing/2014/main" id="{5F125B02-0508-C44D-3C4E-93D0F9E25769}"/>
+              </a:ext>
+            </a:extLst>
+          </p:cNvPr>
+          <p:cNvSpPr txBox="1"/>
+          <p:nvPr/>
+        </p:nvSpPr>
+        <p:spPr>
+          <a:xfrm>
+            <a:off x="368808" y="5910094"/>
+            <a:ext cx="2549609" cy="369332"/>
+          </a:xfrm>
+          <a:prstGeom prst="rect">
+            <a:avLst/>
+          </a:prstGeom>
+          <a:noFill/>
+        </p:spPr>
+        <p:txBody>
+          <a:bodyPr wrap="none" rtlCol="0">
+            <a:spAutoFit/>
+          </a:bodyPr>
+          <a:lstStyle/>
+          <a:p>
+            <a:r>
+              <a:rPr lang="en-US" dirty="0"/>
+              <a:t>Overall good agreement</a:t>
+            </a:r>
+          </a:p>
+        </p:txBody>
+      </p:sp>
       <p:pic>
         <p:nvPicPr>
-          <p:cNvPr id="2" name="Picture 1">
-            <a:extLst>
-              <a:ext uri="{FF2B5EF4-FFF2-40B4-BE49-F238E27FC236}">
-                <a16:creationId xmlns:a16="http://schemas.microsoft.com/office/drawing/2014/main" id="{CC531AD5-440A-0834-D8D1-7055B0E948F5}"/>
+          <p:cNvPr id="4" name="Picture 3">
+            <a:extLst>
+              <a:ext uri="{FF2B5EF4-FFF2-40B4-BE49-F238E27FC236}">
+                <a16:creationId xmlns:a16="http://schemas.microsoft.com/office/drawing/2014/main" id="{687CB88B-B305-8717-EF40-1B3CFFE2A5AB}"/>
               </a:ext>
             </a:extLst>
           </p:cNvPr>
@@ -6919,49 +6932,14 @@
         </p:blipFill>
         <p:spPr>
           <a:xfrm>
-            <a:off x="4901184" y="1004675"/>
-            <a:ext cx="6922008" cy="4949233"/>
+            <a:off x="4901184" y="1017359"/>
+            <a:ext cx="6894923" cy="4929987"/>
           </a:xfrm>
           <a:prstGeom prst="rect">
             <a:avLst/>
           </a:prstGeom>
         </p:spPr>
       </p:pic>
-      <p:sp>
-        <p:nvSpPr>
-          <p:cNvPr id="3" name="TextBox 2">
-            <a:extLst>
-              <a:ext uri="{FF2B5EF4-FFF2-40B4-BE49-F238E27FC236}">
-                <a16:creationId xmlns:a16="http://schemas.microsoft.com/office/drawing/2014/main" id="{5F125B02-0508-C44D-3C4E-93D0F9E25769}"/>
-              </a:ext>
-            </a:extLst>
-          </p:cNvPr>
-          <p:cNvSpPr txBox="1"/>
-          <p:nvPr/>
-        </p:nvSpPr>
-        <p:spPr>
-          <a:xfrm>
-            <a:off x="368808" y="5910094"/>
-            <a:ext cx="2549609" cy="369332"/>
-          </a:xfrm>
-          <a:prstGeom prst="rect">
-            <a:avLst/>
-          </a:prstGeom>
-          <a:noFill/>
-        </p:spPr>
-        <p:txBody>
-          <a:bodyPr wrap="none" rtlCol="0">
-            <a:spAutoFit/>
-          </a:bodyPr>
-          <a:lstStyle/>
-          <a:p>
-            <a:r>
-              <a:rPr lang="en-US" dirty="0"/>
-              <a:t>Overall good agreement</a:t>
-            </a:r>
-          </a:p>
-        </p:txBody>
-      </p:sp>
     </p:spTree>
     <p:extLst>
       <p:ext uri="{BB962C8B-B14F-4D97-AF65-F5344CB8AC3E}">
@@ -7729,12 +7707,47 @@
           </a:p>
         </p:txBody>
       </p:sp>
+      <p:sp>
+        <p:nvSpPr>
+          <p:cNvPr id="3" name="TextBox 2">
+            <a:extLst>
+              <a:ext uri="{FF2B5EF4-FFF2-40B4-BE49-F238E27FC236}">
+                <a16:creationId xmlns:a16="http://schemas.microsoft.com/office/drawing/2014/main" id="{190B403E-4D79-BC6E-57B2-4D32411A06AB}"/>
+              </a:ext>
+            </a:extLst>
+          </p:cNvPr>
+          <p:cNvSpPr txBox="1"/>
+          <p:nvPr/>
+        </p:nvSpPr>
+        <p:spPr>
+          <a:xfrm>
+            <a:off x="368808" y="5910094"/>
+            <a:ext cx="2549609" cy="369332"/>
+          </a:xfrm>
+          <a:prstGeom prst="rect">
+            <a:avLst/>
+          </a:prstGeom>
+          <a:noFill/>
+        </p:spPr>
+        <p:txBody>
+          <a:bodyPr wrap="none" rtlCol="0">
+            <a:spAutoFit/>
+          </a:bodyPr>
+          <a:lstStyle/>
+          <a:p>
+            <a:r>
+              <a:rPr lang="en-US" dirty="0"/>
+              <a:t>Overall good agreement</a:t>
+            </a:r>
+          </a:p>
+        </p:txBody>
+      </p:sp>
       <p:pic>
         <p:nvPicPr>
-          <p:cNvPr id="2" name="Picture 1">
-            <a:extLst>
-              <a:ext uri="{FF2B5EF4-FFF2-40B4-BE49-F238E27FC236}">
-                <a16:creationId xmlns:a16="http://schemas.microsoft.com/office/drawing/2014/main" id="{3817E333-8529-8209-2033-9FACA069BE03}"/>
+          <p:cNvPr id="4" name="Picture 3">
+            <a:extLst>
+              <a:ext uri="{FF2B5EF4-FFF2-40B4-BE49-F238E27FC236}">
+                <a16:creationId xmlns:a16="http://schemas.microsoft.com/office/drawing/2014/main" id="{BECA3714-305F-2E22-8B22-16A267637C5C}"/>
               </a:ext>
             </a:extLst>
           </p:cNvPr>
@@ -7751,49 +7764,14 @@
         </p:blipFill>
         <p:spPr>
           <a:xfrm>
-            <a:off x="4901184" y="1004675"/>
-            <a:ext cx="6922008" cy="4949233"/>
+            <a:off x="4941632" y="1032720"/>
+            <a:ext cx="6922008" cy="4949354"/>
           </a:xfrm>
           <a:prstGeom prst="rect">
             <a:avLst/>
           </a:prstGeom>
         </p:spPr>
       </p:pic>
-      <p:sp>
-        <p:nvSpPr>
-          <p:cNvPr id="3" name="TextBox 2">
-            <a:extLst>
-              <a:ext uri="{FF2B5EF4-FFF2-40B4-BE49-F238E27FC236}">
-                <a16:creationId xmlns:a16="http://schemas.microsoft.com/office/drawing/2014/main" id="{190B403E-4D79-BC6E-57B2-4D32411A06AB}"/>
-              </a:ext>
-            </a:extLst>
-          </p:cNvPr>
-          <p:cNvSpPr txBox="1"/>
-          <p:nvPr/>
-        </p:nvSpPr>
-        <p:spPr>
-          <a:xfrm>
-            <a:off x="368808" y="5910094"/>
-            <a:ext cx="2549609" cy="369332"/>
-          </a:xfrm>
-          <a:prstGeom prst="rect">
-            <a:avLst/>
-          </a:prstGeom>
-          <a:noFill/>
-        </p:spPr>
-        <p:txBody>
-          <a:bodyPr wrap="none" rtlCol="0">
-            <a:spAutoFit/>
-          </a:bodyPr>
-          <a:lstStyle/>
-          <a:p>
-            <a:r>
-              <a:rPr lang="en-US" dirty="0"/>
-              <a:t>Overall good agreement</a:t>
-            </a:r>
-          </a:p>
-        </p:txBody>
-      </p:sp>
     </p:spTree>
     <p:extLst>
       <p:ext uri="{BB962C8B-B14F-4D97-AF65-F5344CB8AC3E}">
@@ -8561,12 +8539,53 @@
           </a:p>
         </p:txBody>
       </p:sp>
+      <p:sp>
+        <p:nvSpPr>
+          <p:cNvPr id="3" name="TextBox 2">
+            <a:extLst>
+              <a:ext uri="{FF2B5EF4-FFF2-40B4-BE49-F238E27FC236}">
+                <a16:creationId xmlns:a16="http://schemas.microsoft.com/office/drawing/2014/main" id="{E71042DC-A2FC-CFDB-91E5-E99B1F62622E}"/>
+              </a:ext>
+            </a:extLst>
+          </p:cNvPr>
+          <p:cNvSpPr txBox="1"/>
+          <p:nvPr/>
+        </p:nvSpPr>
+        <p:spPr>
+          <a:xfrm>
+            <a:off x="439628" y="5696712"/>
+            <a:ext cx="5127237" cy="646331"/>
+          </a:xfrm>
+          <a:prstGeom prst="rect">
+            <a:avLst/>
+          </a:prstGeom>
+          <a:noFill/>
+        </p:spPr>
+        <p:txBody>
+          <a:bodyPr wrap="none" rtlCol="0">
+            <a:spAutoFit/>
+          </a:bodyPr>
+          <a:lstStyle/>
+          <a:p>
+            <a:r>
+              <a:rPr lang="en-US" dirty="0"/>
+              <a:t>This passband show significant deviation.</a:t>
+            </a:r>
+          </a:p>
+          <a:p>
+            <a:r>
+              <a:rPr lang="en-US" b="1" dirty="0"/>
+              <a:t>- Change of atomic data in new Chianti version?</a:t>
+            </a:r>
+          </a:p>
+        </p:txBody>
+      </p:sp>
       <p:pic>
         <p:nvPicPr>
-          <p:cNvPr id="2" name="Picture 1">
-            <a:extLst>
-              <a:ext uri="{FF2B5EF4-FFF2-40B4-BE49-F238E27FC236}">
-                <a16:creationId xmlns:a16="http://schemas.microsoft.com/office/drawing/2014/main" id="{D572C0C6-85CA-E676-2F29-3EB675B34941}"/>
+          <p:cNvPr id="4" name="Picture 3">
+            <a:extLst>
+              <a:ext uri="{FF2B5EF4-FFF2-40B4-BE49-F238E27FC236}">
+                <a16:creationId xmlns:a16="http://schemas.microsoft.com/office/drawing/2014/main" id="{069C7F00-16EC-FE74-3543-9236774B1014}"/>
               </a:ext>
             </a:extLst>
           </p:cNvPr>
@@ -8583,55 +8602,14 @@
         </p:blipFill>
         <p:spPr>
           <a:xfrm>
-            <a:off x="4901184" y="1004675"/>
-            <a:ext cx="6922008" cy="4949233"/>
+            <a:off x="4861628" y="1029785"/>
+            <a:ext cx="6921839" cy="4949233"/>
           </a:xfrm>
           <a:prstGeom prst="rect">
             <a:avLst/>
           </a:prstGeom>
         </p:spPr>
       </p:pic>
-      <p:sp>
-        <p:nvSpPr>
-          <p:cNvPr id="3" name="TextBox 2">
-            <a:extLst>
-              <a:ext uri="{FF2B5EF4-FFF2-40B4-BE49-F238E27FC236}">
-                <a16:creationId xmlns:a16="http://schemas.microsoft.com/office/drawing/2014/main" id="{E71042DC-A2FC-CFDB-91E5-E99B1F62622E}"/>
-              </a:ext>
-            </a:extLst>
-          </p:cNvPr>
-          <p:cNvSpPr txBox="1"/>
-          <p:nvPr/>
-        </p:nvSpPr>
-        <p:spPr>
-          <a:xfrm>
-            <a:off x="439628" y="5696712"/>
-            <a:ext cx="5127237" cy="646331"/>
-          </a:xfrm>
-          <a:prstGeom prst="rect">
-            <a:avLst/>
-          </a:prstGeom>
-          <a:noFill/>
-        </p:spPr>
-        <p:txBody>
-          <a:bodyPr wrap="none" rtlCol="0">
-            <a:spAutoFit/>
-          </a:bodyPr>
-          <a:lstStyle/>
-          <a:p>
-            <a:r>
-              <a:rPr lang="en-US" dirty="0"/>
-              <a:t>This passband show significant deviation.</a:t>
-            </a:r>
-          </a:p>
-          <a:p>
-            <a:r>
-              <a:rPr lang="en-US" b="1" dirty="0"/>
-              <a:t>- Change of atomic data in new Chianti version?</a:t>
-            </a:r>
-          </a:p>
-        </p:txBody>
-      </p:sp>
     </p:spTree>
     <p:extLst>
       <p:ext uri="{BB962C8B-B14F-4D97-AF65-F5344CB8AC3E}">
@@ -9399,12 +9377,47 @@
           </a:p>
         </p:txBody>
       </p:sp>
+      <p:sp>
+        <p:nvSpPr>
+          <p:cNvPr id="3" name="TextBox 2">
+            <a:extLst>
+              <a:ext uri="{FF2B5EF4-FFF2-40B4-BE49-F238E27FC236}">
+                <a16:creationId xmlns:a16="http://schemas.microsoft.com/office/drawing/2014/main" id="{01E05E28-6183-8B23-4E92-E8D4A9456DDA}"/>
+              </a:ext>
+            </a:extLst>
+          </p:cNvPr>
+          <p:cNvSpPr txBox="1"/>
+          <p:nvPr/>
+        </p:nvSpPr>
+        <p:spPr>
+          <a:xfrm>
+            <a:off x="368808" y="5910094"/>
+            <a:ext cx="2549609" cy="369332"/>
+          </a:xfrm>
+          <a:prstGeom prst="rect">
+            <a:avLst/>
+          </a:prstGeom>
+          <a:noFill/>
+        </p:spPr>
+        <p:txBody>
+          <a:bodyPr wrap="none" rtlCol="0">
+            <a:spAutoFit/>
+          </a:bodyPr>
+          <a:lstStyle/>
+          <a:p>
+            <a:r>
+              <a:rPr lang="en-US" dirty="0"/>
+              <a:t>Overall good agreement</a:t>
+            </a:r>
+          </a:p>
+        </p:txBody>
+      </p:sp>
       <p:pic>
         <p:nvPicPr>
-          <p:cNvPr id="2" name="Picture 1">
-            <a:extLst>
-              <a:ext uri="{FF2B5EF4-FFF2-40B4-BE49-F238E27FC236}">
-                <a16:creationId xmlns:a16="http://schemas.microsoft.com/office/drawing/2014/main" id="{12B3C454-C393-6C18-BC0D-08169FC613D0}"/>
+          <p:cNvPr id="4" name="Picture 3">
+            <a:extLst>
+              <a:ext uri="{FF2B5EF4-FFF2-40B4-BE49-F238E27FC236}">
+                <a16:creationId xmlns:a16="http://schemas.microsoft.com/office/drawing/2014/main" id="{51C423DC-800E-CE25-957E-E46BE25C7AFB}"/>
               </a:ext>
             </a:extLst>
           </p:cNvPr>
@@ -9421,49 +9434,14 @@
         </p:blipFill>
         <p:spPr>
           <a:xfrm>
-            <a:off x="4901184" y="1004675"/>
-            <a:ext cx="6922008" cy="4949233"/>
+            <a:off x="4874099" y="1035866"/>
+            <a:ext cx="6922008" cy="4949354"/>
           </a:xfrm>
           <a:prstGeom prst="rect">
             <a:avLst/>
           </a:prstGeom>
         </p:spPr>
       </p:pic>
-      <p:sp>
-        <p:nvSpPr>
-          <p:cNvPr id="3" name="TextBox 2">
-            <a:extLst>
-              <a:ext uri="{FF2B5EF4-FFF2-40B4-BE49-F238E27FC236}">
-                <a16:creationId xmlns:a16="http://schemas.microsoft.com/office/drawing/2014/main" id="{01E05E28-6183-8B23-4E92-E8D4A9456DDA}"/>
-              </a:ext>
-            </a:extLst>
-          </p:cNvPr>
-          <p:cNvSpPr txBox="1"/>
-          <p:nvPr/>
-        </p:nvSpPr>
-        <p:spPr>
-          <a:xfrm>
-            <a:off x="368808" y="5910094"/>
-            <a:ext cx="2549609" cy="369332"/>
-          </a:xfrm>
-          <a:prstGeom prst="rect">
-            <a:avLst/>
-          </a:prstGeom>
-          <a:noFill/>
-        </p:spPr>
-        <p:txBody>
-          <a:bodyPr wrap="none" rtlCol="0">
-            <a:spAutoFit/>
-          </a:bodyPr>
-          <a:lstStyle/>
-          <a:p>
-            <a:r>
-              <a:rPr lang="en-US" dirty="0"/>
-              <a:t>Overall good agreement</a:t>
-            </a:r>
-          </a:p>
-        </p:txBody>
-      </p:sp>
     </p:spTree>
     <p:extLst>
       <p:ext uri="{BB962C8B-B14F-4D97-AF65-F5344CB8AC3E}">

--- a/AIA_response_functions.pptx
+++ b/AIA_response_functions.pptx
@@ -3559,15 +3559,7 @@
             </a:r>
             <a:r>
               <a:rPr lang="en-US" dirty="0"/>
-              <a:t>(/temperature,/dn, /</a:t>
-            </a:r>
-            <a:r>
-              <a:rPr lang="en-US" dirty="0" err="1"/>
-              <a:t>evenorm</a:t>
-            </a:r>
-            <a:r>
-              <a:rPr lang="en-US" dirty="0"/>
-              <a:t>, </a:t>
+              <a:t>(/temperature,/dn, </a:t>
             </a:r>
             <a:r>
               <a:rPr lang="en-US" dirty="0" err="1"/>
@@ -3575,16 +3567,13 @@
             </a:r>
             <a:r>
               <a:rPr lang="en-US" dirty="0"/>
-              <a:t>=‘1-May-2010’, /</a:t>
-            </a:r>
-            <a:r>
-              <a:rPr lang="en-US" dirty="0" err="1"/>
-              <a:t>chiantifix</a:t>
-            </a:r>
-            <a:r>
-              <a:rPr lang="en-US" dirty="0"/>
-              <a:t>)]: </a:t>
-            </a:r>
+              <a:t>=‘</a:t>
+            </a:r>
+            <a:r>
+              <a:rPr lang="en-US"/>
+              <a:t>1-May-2010’,/area): </a:t>
+            </a:r>
+            <a:endParaRPr lang="en-US" dirty="0"/>
           </a:p>
         </p:txBody>
       </p:sp>
@@ -4364,7 +4353,7 @@
         <p:spPr>
           <a:xfrm>
             <a:off x="368808" y="5910094"/>
-            <a:ext cx="11521937" cy="646331"/>
+            <a:ext cx="6950814" cy="646331"/>
           </a:xfrm>
           <a:prstGeom prst="rect">
             <a:avLst/>
@@ -4393,24 +4382,13 @@
           <a:p>
             <a:r>
               <a:rPr lang="en-US" b="1" dirty="0"/>
-              <a:t>- Change of atomic data in new Chianti version or the effect of ‘</a:t>
-            </a:r>
-            <a:r>
-              <a:rPr lang="en-US" b="1" dirty="0" err="1"/>
-              <a:t>chiantifix</a:t>
-            </a:r>
-            <a:r>
-              <a:rPr lang="en-US" b="1" dirty="0"/>
-              <a:t>’ analytical factor in </a:t>
-            </a:r>
-            <a:r>
-              <a:rPr lang="en-US" b="1" dirty="0" err="1"/>
-              <a:t>ssw</a:t>
-            </a:r>
-            <a:r>
-              <a:rPr lang="en-US" b="1" dirty="0"/>
-              <a:t> calculation?</a:t>
-            </a:r>
+              <a:t>- Change of atomic data in new Chianti </a:t>
+            </a:r>
+            <a:r>
+              <a:rPr lang="en-US" b="1"/>
+              <a:t>version ?</a:t>
+            </a:r>
+            <a:endParaRPr lang="en-US" b="1" dirty="0"/>
           </a:p>
         </p:txBody>
       </p:sp>

--- a/AIA_response_functions.pptx
+++ b/AIA_response_functions.pptx
@@ -3520,8 +3520,8 @@
         </p:nvSpPr>
         <p:spPr>
           <a:xfrm>
-            <a:off x="911299" y="4928448"/>
-            <a:ext cx="10369402" cy="883383"/>
+            <a:off x="646894" y="4772985"/>
+            <a:ext cx="8519140" cy="1928798"/>
           </a:xfrm>
           <a:prstGeom prst="rect">
             <a:avLst/>
@@ -3542,38 +3542,133 @@
               <a:buChar char="•"/>
             </a:pPr>
             <a:r>
+              <a:rPr lang="en-US" u="sng" dirty="0">
+                <a:solidFill>
+                  <a:srgbClr val="00B050"/>
+                </a:solidFill>
+              </a:rPr>
+              <a:t>Also compare chianti responses with SSW calculated response: </a:t>
+            </a:r>
+            <a:r>
+              <a:rPr lang="en-US" dirty="0">
+                <a:solidFill>
+                  <a:srgbClr val="00B050"/>
+                </a:solidFill>
+              </a:rPr>
+              <a:t>	</a:t>
+            </a:r>
+            <a:r>
+              <a:rPr lang="en-US" sz="1500" dirty="0" err="1"/>
+              <a:t>tresp</a:t>
+            </a:r>
+            <a:r>
+              <a:rPr lang="en-US" sz="1500" dirty="0"/>
+              <a:t>=</a:t>
+            </a:r>
+            <a:r>
+              <a:rPr lang="en-US" sz="1500" dirty="0" err="1"/>
+              <a:t>aia_get_response</a:t>
+            </a:r>
+            <a:r>
+              <a:rPr lang="en-US" sz="1500" dirty="0"/>
+              <a:t>(/temperature,/dn, </a:t>
+            </a:r>
+            <a:r>
+              <a:rPr lang="en-US" sz="1500" dirty="0" err="1"/>
+              <a:t>timedepend_date</a:t>
+            </a:r>
+            <a:r>
+              <a:rPr lang="en-US" sz="1500" dirty="0"/>
+              <a:t>=‘1-May-2010’,/area):</a:t>
+            </a:r>
+          </a:p>
+          <a:p>
+            <a:pPr marL="628650" lvl="1" indent="-171450">
+              <a:lnSpc>
+                <a:spcPct val="150000"/>
+              </a:lnSpc>
+              <a:buFont typeface="Arial" panose="020B0604020202020204" pitchFamily="34" charset="0"/>
+              <a:buChar char="•"/>
+            </a:pPr>
+            <a:r>
+              <a:rPr lang="en-US" sz="1500" dirty="0"/>
+              <a:t>In SSW calculation empirical correction (</a:t>
+            </a:r>
+            <a:r>
+              <a:rPr lang="en-US" sz="1500" dirty="0" err="1"/>
+              <a:t>chiantifix</a:t>
+            </a:r>
+            <a:r>
+              <a:rPr lang="en-US" sz="1500" dirty="0"/>
+              <a:t>) is not applied. </a:t>
+            </a:r>
+          </a:p>
+          <a:p>
+            <a:pPr marL="628650" lvl="1" indent="-171450">
+              <a:lnSpc>
+                <a:spcPct val="150000"/>
+              </a:lnSpc>
+              <a:buFont typeface="Arial" panose="020B0604020202020204" pitchFamily="34" charset="0"/>
+              <a:buChar char="•"/>
+            </a:pPr>
+            <a:r>
+              <a:rPr lang="en-US" sz="1500" dirty="0"/>
+              <a:t>SSW calculations are based on Chianti version-9</a:t>
+            </a:r>
+          </a:p>
+          <a:p>
+            <a:pPr marL="628650" lvl="1" indent="-171450">
+              <a:lnSpc>
+                <a:spcPct val="150000"/>
+              </a:lnSpc>
+              <a:buFont typeface="Arial" panose="020B0604020202020204" pitchFamily="34" charset="0"/>
+              <a:buChar char="•"/>
+            </a:pPr>
+            <a:r>
+              <a:rPr lang="en-US" sz="1500" dirty="0"/>
+              <a:t>SSW calculations used Feldman coronal abundances</a:t>
+            </a:r>
+          </a:p>
+        </p:txBody>
+      </p:sp>
+      <p:sp>
+        <p:nvSpPr>
+          <p:cNvPr id="2" name="TextBox 1">
+            <a:extLst>
+              <a:ext uri="{FF2B5EF4-FFF2-40B4-BE49-F238E27FC236}">
+                <a16:creationId xmlns:a16="http://schemas.microsoft.com/office/drawing/2014/main" id="{ABD7BCCC-7007-42C9-5509-95849E19AD6E}"/>
+              </a:ext>
+            </a:extLst>
+          </p:cNvPr>
+          <p:cNvSpPr txBox="1"/>
+          <p:nvPr/>
+        </p:nvSpPr>
+        <p:spPr>
+          <a:xfrm>
+            <a:off x="10146535" y="6055452"/>
+            <a:ext cx="1756828" cy="646331"/>
+          </a:xfrm>
+          <a:prstGeom prst="rect">
+            <a:avLst/>
+          </a:prstGeom>
+          <a:noFill/>
+        </p:spPr>
+        <p:txBody>
+          <a:bodyPr wrap="none" rtlCol="0">
+            <a:spAutoFit/>
+          </a:bodyPr>
+          <a:lstStyle/>
+          <a:p>
+            <a:r>
               <a:rPr lang="en-US" dirty="0"/>
-              <a:t>Also compare chianti responses with SSW calculated response: </a:t>
-            </a:r>
-            <a:r>
-              <a:rPr lang="en-US" dirty="0" err="1"/>
-              <a:t>tresp</a:t>
-            </a:r>
+              <a:t>Biswajit Mondal</a:t>
+            </a:r>
+          </a:p>
+          <a:p>
             <a:r>
               <a:rPr lang="en-US" dirty="0"/>
-              <a:t>=</a:t>
-            </a:r>
-            <a:r>
-              <a:rPr lang="en-US" dirty="0" err="1"/>
-              <a:t>aia_get_response</a:t>
-            </a:r>
-            <a:r>
-              <a:rPr lang="en-US" dirty="0"/>
-              <a:t>(/temperature,/dn, </a:t>
-            </a:r>
-            <a:r>
-              <a:rPr lang="en-US" dirty="0" err="1"/>
-              <a:t>timedepend_date</a:t>
-            </a:r>
-            <a:r>
-              <a:rPr lang="en-US" dirty="0"/>
-              <a:t>=‘</a:t>
-            </a:r>
-            <a:r>
-              <a:rPr lang="en-US"/>
-              <a:t>1-May-2010’,/area): </a:t>
-            </a:r>
-            <a:endParaRPr lang="en-US" dirty="0"/>
+              <a:t>Oct.15.2026</a:t>
+            </a:r>
           </a:p>
         </p:txBody>
       </p:sp>
@@ -4225,10 +4320,10 @@
       </p:sp>
       <p:sp>
         <p:nvSpPr>
-          <p:cNvPr id="10" name="TextBox 9">
-            <a:extLst>
-              <a:ext uri="{FF2B5EF4-FFF2-40B4-BE49-F238E27FC236}">
-                <a16:creationId xmlns:a16="http://schemas.microsoft.com/office/drawing/2014/main" id="{C9BD3680-8A84-145E-967A-AC67416A0CE6}"/>
+          <p:cNvPr id="3" name="TextBox 2">
+            <a:extLst>
+              <a:ext uri="{FF2B5EF4-FFF2-40B4-BE49-F238E27FC236}">
+                <a16:creationId xmlns:a16="http://schemas.microsoft.com/office/drawing/2014/main" id="{2B51519B-DA03-D430-C683-78276503646A}"/>
               </a:ext>
             </a:extLst>
           </p:cNvPr>
@@ -4237,123 +4332,8 @@
         </p:nvSpPr>
         <p:spPr>
           <a:xfrm>
-            <a:off x="371094" y="2718054"/>
-            <a:ext cx="3438906" cy="3207258"/>
-          </a:xfrm>
-          <a:prstGeom prst="rect">
-            <a:avLst/>
-          </a:prstGeom>
-        </p:spPr>
-        <p:txBody>
-          <a:bodyPr vert="horz" lIns="91440" tIns="45720" rIns="91440" bIns="45720" rtlCol="0">
-            <a:normAutofit/>
-          </a:bodyPr>
-          <a:lstStyle/>
-          <a:p>
-            <a:pPr indent="-228600">
-              <a:lnSpc>
-                <a:spcPct val="90000"/>
-              </a:lnSpc>
-              <a:spcAft>
-                <a:spcPts val="600"/>
-              </a:spcAft>
-              <a:buFont typeface="Arial" panose="020B0604020202020204" pitchFamily="34" charset="0"/>
-              <a:buChar char="•"/>
-            </a:pPr>
-            <a:r>
-              <a:rPr lang="en-US" sz="1700"/>
-              <a:t>Solid line: SSW calculated response, which used: </a:t>
-            </a:r>
-          </a:p>
-          <a:p>
-            <a:pPr lvl="1" indent="-228600">
-              <a:lnSpc>
-                <a:spcPct val="90000"/>
-              </a:lnSpc>
-              <a:spcAft>
-                <a:spcPts val="600"/>
-              </a:spcAft>
-              <a:buFont typeface="Arial" panose="020B0604020202020204" pitchFamily="34" charset="0"/>
-              <a:buChar char="•"/>
-            </a:pPr>
-            <a:r>
-              <a:rPr lang="en-US" sz="1700"/>
-              <a:t>Chianti v-9</a:t>
-            </a:r>
-          </a:p>
-          <a:p>
-            <a:pPr lvl="1" indent="-228600">
-              <a:lnSpc>
-                <a:spcPct val="90000"/>
-              </a:lnSpc>
-              <a:spcAft>
-                <a:spcPts val="600"/>
-              </a:spcAft>
-              <a:buFont typeface="Arial" panose="020B0604020202020204" pitchFamily="34" charset="0"/>
-              <a:buChar char="•"/>
-            </a:pPr>
-            <a:r>
-              <a:rPr lang="en-US" sz="1700"/>
-              <a:t>Feldman coronal abundance</a:t>
-            </a:r>
-          </a:p>
-          <a:p>
-            <a:pPr marL="285750" indent="-228600">
-              <a:lnSpc>
-                <a:spcPct val="90000"/>
-              </a:lnSpc>
-              <a:spcAft>
-                <a:spcPts val="600"/>
-              </a:spcAft>
-              <a:buFont typeface="Arial" panose="020B0604020202020204" pitchFamily="34" charset="0"/>
-              <a:buChar char="•"/>
-            </a:pPr>
-            <a:endParaRPr lang="en-US" sz="1700" dirty="0"/>
-          </a:p>
-          <a:p>
-            <a:pPr marL="285750" indent="-228600">
-              <a:lnSpc>
-                <a:spcPct val="90000"/>
-              </a:lnSpc>
-              <a:spcAft>
-                <a:spcPts val="600"/>
-              </a:spcAft>
-              <a:buFont typeface="Arial" panose="020B0604020202020204" pitchFamily="34" charset="0"/>
-              <a:buChar char="•"/>
-            </a:pPr>
-            <a:endParaRPr lang="en-US" sz="1700" dirty="0"/>
-          </a:p>
-          <a:p>
-            <a:pPr marL="285750" indent="-228600">
-              <a:lnSpc>
-                <a:spcPct val="90000"/>
-              </a:lnSpc>
-              <a:spcAft>
-                <a:spcPts val="600"/>
-              </a:spcAft>
-              <a:buFont typeface="Arial" panose="020B0604020202020204" pitchFamily="34" charset="0"/>
-              <a:buChar char="•"/>
-            </a:pPr>
-            <a:endParaRPr lang="en-US" sz="1700" dirty="0"/>
-          </a:p>
-        </p:txBody>
-      </p:sp>
-      <p:sp>
-        <p:nvSpPr>
-          <p:cNvPr id="3" name="TextBox 2">
-            <a:extLst>
-              <a:ext uri="{FF2B5EF4-FFF2-40B4-BE49-F238E27FC236}">
-                <a16:creationId xmlns:a16="http://schemas.microsoft.com/office/drawing/2014/main" id="{2B51519B-DA03-D430-C683-78276503646A}"/>
-              </a:ext>
-            </a:extLst>
-          </p:cNvPr>
-          <p:cNvSpPr txBox="1"/>
-          <p:nvPr/>
-        </p:nvSpPr>
-        <p:spPr>
-          <a:xfrm>
-            <a:off x="368808" y="5910094"/>
-            <a:ext cx="6950814" cy="646331"/>
+            <a:off x="301255" y="3571180"/>
+            <a:ext cx="4788538" cy="1200329"/>
           </a:xfrm>
           <a:prstGeom prst="rect">
             <a:avLst/>
@@ -4361,7 +4341,7 @@
           <a:noFill/>
         </p:spPr>
         <p:txBody>
-          <a:bodyPr wrap="none" rtlCol="0">
+          <a:bodyPr wrap="square" rtlCol="0">
             <a:spAutoFit/>
           </a:bodyPr>
           <a:lstStyle/>
@@ -4382,13 +4362,8 @@
           <a:p>
             <a:r>
               <a:rPr lang="en-US" b="1" dirty="0"/>
-              <a:t>- Change of atomic data in new Chianti </a:t>
-            </a:r>
-            <a:r>
-              <a:rPr lang="en-US" b="1"/>
-              <a:t>version ?</a:t>
-            </a:r>
-            <a:endParaRPr lang="en-US" b="1" dirty="0"/>
+              <a:t>- Change of atomic data in new Chianti version ?</a:t>
+            </a:r>
           </a:p>
         </p:txBody>
       </p:sp>
@@ -4422,6 +4397,96 @@
           </a:prstGeom>
         </p:spPr>
       </p:pic>
+      <p:sp>
+        <p:nvSpPr>
+          <p:cNvPr id="2" name="TextBox 1">
+            <a:extLst>
+              <a:ext uri="{FF2B5EF4-FFF2-40B4-BE49-F238E27FC236}">
+                <a16:creationId xmlns:a16="http://schemas.microsoft.com/office/drawing/2014/main" id="{1BFA53C7-A9A3-009F-4E71-CFF3A09F673B}"/>
+              </a:ext>
+            </a:extLst>
+          </p:cNvPr>
+          <p:cNvSpPr txBox="1"/>
+          <p:nvPr/>
+        </p:nvSpPr>
+        <p:spPr>
+          <a:xfrm>
+            <a:off x="5879528" y="2883307"/>
+            <a:ext cx="3870400" cy="646331"/>
+          </a:xfrm>
+          <a:prstGeom prst="rect">
+            <a:avLst/>
+          </a:prstGeom>
+        </p:spPr>
+        <p:txBody>
+          <a:bodyPr vert="horz" lIns="91440" tIns="45720" rIns="91440" bIns="45720" rtlCol="0">
+            <a:normAutofit/>
+          </a:bodyPr>
+          <a:lstStyle/>
+          <a:p>
+            <a:pPr indent="-228600">
+              <a:lnSpc>
+                <a:spcPct val="90000"/>
+              </a:lnSpc>
+              <a:spcAft>
+                <a:spcPts val="600"/>
+              </a:spcAft>
+              <a:buFont typeface="Arial" panose="020B0604020202020204" pitchFamily="34" charset="0"/>
+              <a:buChar char="•"/>
+            </a:pPr>
+            <a:r>
+              <a:rPr lang="en-US" sz="1700" dirty="0">
+                <a:solidFill>
+                  <a:schemeClr val="tx2">
+                    <a:lumMod val="75000"/>
+                    <a:lumOff val="25000"/>
+                  </a:schemeClr>
+                </a:solidFill>
+              </a:rPr>
+              <a:t>Solid line: SSW calculated response</a:t>
+            </a:r>
+          </a:p>
+          <a:p>
+            <a:pPr marL="285750" indent="-228600">
+              <a:lnSpc>
+                <a:spcPct val="90000"/>
+              </a:lnSpc>
+              <a:spcAft>
+                <a:spcPts val="600"/>
+              </a:spcAft>
+              <a:buFont typeface="Arial" panose="020B0604020202020204" pitchFamily="34" charset="0"/>
+              <a:buChar char="•"/>
+            </a:pPr>
+            <a:endParaRPr lang="en-US" sz="1700" dirty="0"/>
+          </a:p>
+          <a:p>
+            <a:pPr marL="285750" indent="-228600">
+              <a:lnSpc>
+                <a:spcPct val="90000"/>
+              </a:lnSpc>
+              <a:spcAft>
+                <a:spcPts val="600"/>
+              </a:spcAft>
+              <a:buFont typeface="Arial" panose="020B0604020202020204" pitchFamily="34" charset="0"/>
+              <a:buChar char="•"/>
+            </a:pPr>
+            <a:endParaRPr lang="en-US" sz="1700" dirty="0"/>
+          </a:p>
+          <a:p>
+            <a:pPr marL="285750" indent="-228600">
+              <a:lnSpc>
+                <a:spcPct val="90000"/>
+              </a:lnSpc>
+              <a:spcAft>
+                <a:spcPts val="600"/>
+              </a:spcAft>
+              <a:buFont typeface="Arial" panose="020B0604020202020204" pitchFamily="34" charset="0"/>
+              <a:buChar char="•"/>
+            </a:pPr>
+            <a:endParaRPr lang="en-US" sz="1700" dirty="0"/>
+          </a:p>
+        </p:txBody>
+      </p:sp>
     </p:spTree>
     <p:extLst>
       <p:ext uri="{BB962C8B-B14F-4D97-AF65-F5344CB8AC3E}">
@@ -5074,156 +5139,6 @@
           </a:p>
         </p:txBody>
       </p:sp>
-      <p:sp>
-        <p:nvSpPr>
-          <p:cNvPr id="9" name="TextBox 8">
-            <a:extLst>
-              <a:ext uri="{FF2B5EF4-FFF2-40B4-BE49-F238E27FC236}">
-                <a16:creationId xmlns:a16="http://schemas.microsoft.com/office/drawing/2014/main" id="{2B23E4F0-C209-91D6-6962-C5F8CD249E48}"/>
-              </a:ext>
-            </a:extLst>
-          </p:cNvPr>
-          <p:cNvSpPr txBox="1"/>
-          <p:nvPr/>
-        </p:nvSpPr>
-        <p:spPr>
-          <a:xfrm>
-            <a:off x="371094" y="2718054"/>
-            <a:ext cx="3438906" cy="3207258"/>
-          </a:xfrm>
-          <a:prstGeom prst="rect">
-            <a:avLst/>
-          </a:prstGeom>
-        </p:spPr>
-        <p:txBody>
-          <a:bodyPr vert="horz" lIns="91440" tIns="45720" rIns="91440" bIns="45720" rtlCol="0">
-            <a:normAutofit/>
-          </a:bodyPr>
-          <a:lstStyle/>
-          <a:p>
-            <a:pPr indent="-228600">
-              <a:lnSpc>
-                <a:spcPct val="90000"/>
-              </a:lnSpc>
-              <a:spcAft>
-                <a:spcPts val="600"/>
-              </a:spcAft>
-              <a:buFont typeface="Arial" panose="020B0604020202020204" pitchFamily="34" charset="0"/>
-              <a:buChar char="•"/>
-            </a:pPr>
-            <a:r>
-              <a:rPr lang="en-US" sz="1700" dirty="0"/>
-              <a:t>Solid line: SSW calculated response, which used: </a:t>
-            </a:r>
-          </a:p>
-          <a:p>
-            <a:pPr lvl="1" indent="-228600">
-              <a:lnSpc>
-                <a:spcPct val="90000"/>
-              </a:lnSpc>
-              <a:spcAft>
-                <a:spcPts val="600"/>
-              </a:spcAft>
-              <a:buFont typeface="Arial" panose="020B0604020202020204" pitchFamily="34" charset="0"/>
-              <a:buChar char="•"/>
-            </a:pPr>
-            <a:r>
-              <a:rPr lang="en-US" sz="1700" dirty="0"/>
-              <a:t>Chianti v-9</a:t>
-            </a:r>
-          </a:p>
-          <a:p>
-            <a:pPr lvl="1" indent="-228600">
-              <a:lnSpc>
-                <a:spcPct val="90000"/>
-              </a:lnSpc>
-              <a:spcAft>
-                <a:spcPts val="600"/>
-              </a:spcAft>
-              <a:buFont typeface="Arial" panose="020B0604020202020204" pitchFamily="34" charset="0"/>
-              <a:buChar char="•"/>
-            </a:pPr>
-            <a:r>
-              <a:rPr lang="en-US" sz="1700" dirty="0"/>
-              <a:t>Feldman coronal abundance</a:t>
-            </a:r>
-          </a:p>
-          <a:p>
-            <a:pPr marL="285750" indent="-228600">
-              <a:lnSpc>
-                <a:spcPct val="90000"/>
-              </a:lnSpc>
-              <a:spcAft>
-                <a:spcPts val="600"/>
-              </a:spcAft>
-              <a:buFont typeface="Arial" panose="020B0604020202020204" pitchFamily="34" charset="0"/>
-              <a:buChar char="•"/>
-            </a:pPr>
-            <a:endParaRPr lang="en-US" sz="1700" dirty="0"/>
-          </a:p>
-          <a:p>
-            <a:pPr marL="285750" indent="-228600">
-              <a:lnSpc>
-                <a:spcPct val="90000"/>
-              </a:lnSpc>
-              <a:spcAft>
-                <a:spcPts val="600"/>
-              </a:spcAft>
-              <a:buFont typeface="Arial" panose="020B0604020202020204" pitchFamily="34" charset="0"/>
-              <a:buChar char="•"/>
-            </a:pPr>
-            <a:endParaRPr lang="en-US" sz="1700" dirty="0"/>
-          </a:p>
-          <a:p>
-            <a:pPr marL="285750" indent="-228600">
-              <a:lnSpc>
-                <a:spcPct val="90000"/>
-              </a:lnSpc>
-              <a:spcAft>
-                <a:spcPts val="600"/>
-              </a:spcAft>
-              <a:buFont typeface="Arial" panose="020B0604020202020204" pitchFamily="34" charset="0"/>
-              <a:buChar char="•"/>
-            </a:pPr>
-            <a:endParaRPr lang="en-US" sz="1700" dirty="0"/>
-          </a:p>
-        </p:txBody>
-      </p:sp>
-      <p:sp>
-        <p:nvSpPr>
-          <p:cNvPr id="3" name="TextBox 2">
-            <a:extLst>
-              <a:ext uri="{FF2B5EF4-FFF2-40B4-BE49-F238E27FC236}">
-                <a16:creationId xmlns:a16="http://schemas.microsoft.com/office/drawing/2014/main" id="{DB50A09B-A667-2C93-CAF7-7AFF4DA57E60}"/>
-              </a:ext>
-            </a:extLst>
-          </p:cNvPr>
-          <p:cNvSpPr txBox="1"/>
-          <p:nvPr/>
-        </p:nvSpPr>
-        <p:spPr>
-          <a:xfrm>
-            <a:off x="368808" y="5910094"/>
-            <a:ext cx="2549609" cy="369332"/>
-          </a:xfrm>
-          <a:prstGeom prst="rect">
-            <a:avLst/>
-          </a:prstGeom>
-          <a:noFill/>
-        </p:spPr>
-        <p:txBody>
-          <a:bodyPr wrap="none" rtlCol="0">
-            <a:spAutoFit/>
-          </a:bodyPr>
-          <a:lstStyle/>
-          <a:p>
-            <a:r>
-              <a:rPr lang="en-US" dirty="0"/>
-              <a:t>Overall good agreement</a:t>
-            </a:r>
-          </a:p>
-        </p:txBody>
-      </p:sp>
       <p:pic>
         <p:nvPicPr>
           <p:cNvPr id="4" name="Picture 3">
@@ -5254,6 +5169,131 @@
           </a:prstGeom>
         </p:spPr>
       </p:pic>
+      <p:sp>
+        <p:nvSpPr>
+          <p:cNvPr id="2" name="TextBox 1">
+            <a:extLst>
+              <a:ext uri="{FF2B5EF4-FFF2-40B4-BE49-F238E27FC236}">
+                <a16:creationId xmlns:a16="http://schemas.microsoft.com/office/drawing/2014/main" id="{02929EF2-85C0-223A-15EF-07F785A62228}"/>
+              </a:ext>
+            </a:extLst>
+          </p:cNvPr>
+          <p:cNvSpPr txBox="1"/>
+          <p:nvPr/>
+        </p:nvSpPr>
+        <p:spPr>
+          <a:xfrm>
+            <a:off x="6704665" y="4800242"/>
+            <a:ext cx="3870400" cy="646331"/>
+          </a:xfrm>
+          <a:prstGeom prst="rect">
+            <a:avLst/>
+          </a:prstGeom>
+        </p:spPr>
+        <p:txBody>
+          <a:bodyPr vert="horz" lIns="91440" tIns="45720" rIns="91440" bIns="45720" rtlCol="0">
+            <a:normAutofit/>
+          </a:bodyPr>
+          <a:lstStyle/>
+          <a:p>
+            <a:pPr indent="-228600">
+              <a:lnSpc>
+                <a:spcPct val="90000"/>
+              </a:lnSpc>
+              <a:spcAft>
+                <a:spcPts val="600"/>
+              </a:spcAft>
+              <a:buFont typeface="Arial" panose="020B0604020202020204" pitchFamily="34" charset="0"/>
+              <a:buChar char="•"/>
+            </a:pPr>
+            <a:r>
+              <a:rPr lang="en-US" sz="1700" dirty="0">
+                <a:solidFill>
+                  <a:schemeClr val="tx2">
+                    <a:lumMod val="75000"/>
+                    <a:lumOff val="25000"/>
+                  </a:schemeClr>
+                </a:solidFill>
+              </a:rPr>
+              <a:t>Solid line: SSW calculated response</a:t>
+            </a:r>
+          </a:p>
+          <a:p>
+            <a:pPr marL="285750" indent="-228600">
+              <a:lnSpc>
+                <a:spcPct val="90000"/>
+              </a:lnSpc>
+              <a:spcAft>
+                <a:spcPts val="600"/>
+              </a:spcAft>
+              <a:buFont typeface="Arial" panose="020B0604020202020204" pitchFamily="34" charset="0"/>
+              <a:buChar char="•"/>
+            </a:pPr>
+            <a:endParaRPr lang="en-US" sz="1700" dirty="0"/>
+          </a:p>
+          <a:p>
+            <a:pPr marL="285750" indent="-228600">
+              <a:lnSpc>
+                <a:spcPct val="90000"/>
+              </a:lnSpc>
+              <a:spcAft>
+                <a:spcPts val="600"/>
+              </a:spcAft>
+              <a:buFont typeface="Arial" panose="020B0604020202020204" pitchFamily="34" charset="0"/>
+              <a:buChar char="•"/>
+            </a:pPr>
+            <a:endParaRPr lang="en-US" sz="1700" dirty="0"/>
+          </a:p>
+          <a:p>
+            <a:pPr marL="285750" indent="-228600">
+              <a:lnSpc>
+                <a:spcPct val="90000"/>
+              </a:lnSpc>
+              <a:spcAft>
+                <a:spcPts val="600"/>
+              </a:spcAft>
+              <a:buFont typeface="Arial" panose="020B0604020202020204" pitchFamily="34" charset="0"/>
+              <a:buChar char="•"/>
+            </a:pPr>
+            <a:endParaRPr lang="en-US" sz="1700" dirty="0"/>
+          </a:p>
+        </p:txBody>
+      </p:sp>
+      <p:sp>
+        <p:nvSpPr>
+          <p:cNvPr id="6" name="TextBox 5">
+            <a:extLst>
+              <a:ext uri="{FF2B5EF4-FFF2-40B4-BE49-F238E27FC236}">
+                <a16:creationId xmlns:a16="http://schemas.microsoft.com/office/drawing/2014/main" id="{65DF8FFB-6BE4-3BDA-CD73-816AB79C13A9}"/>
+              </a:ext>
+            </a:extLst>
+          </p:cNvPr>
+          <p:cNvSpPr txBox="1"/>
+          <p:nvPr/>
+        </p:nvSpPr>
+        <p:spPr>
+          <a:xfrm>
+            <a:off x="863008" y="3002711"/>
+            <a:ext cx="2549609" cy="369332"/>
+          </a:xfrm>
+          <a:prstGeom prst="rect">
+            <a:avLst/>
+          </a:prstGeom>
+          <a:noFill/>
+        </p:spPr>
+        <p:txBody>
+          <a:bodyPr wrap="none" rtlCol="0">
+            <a:spAutoFit/>
+          </a:bodyPr>
+          <a:lstStyle/>
+          <a:p>
+            <a:r>
+              <a:rPr lang="en-US" dirty="0"/>
+              <a:t>Overall good agreement</a:t>
+            </a:r>
+          </a:p>
+        </p:txBody>
+      </p:sp>
     </p:spTree>
     <p:extLst>
       <p:ext uri="{BB962C8B-B14F-4D97-AF65-F5344CB8AC3E}">
@@ -5906,156 +5946,6 @@
           </a:p>
         </p:txBody>
       </p:sp>
-      <p:sp>
-        <p:nvSpPr>
-          <p:cNvPr id="10" name="TextBox 9">
-            <a:extLst>
-              <a:ext uri="{FF2B5EF4-FFF2-40B4-BE49-F238E27FC236}">
-                <a16:creationId xmlns:a16="http://schemas.microsoft.com/office/drawing/2014/main" id="{E42F9D1F-BD16-1F55-6259-6F884A88209A}"/>
-              </a:ext>
-            </a:extLst>
-          </p:cNvPr>
-          <p:cNvSpPr txBox="1"/>
-          <p:nvPr/>
-        </p:nvSpPr>
-        <p:spPr>
-          <a:xfrm>
-            <a:off x="371094" y="2718054"/>
-            <a:ext cx="3438906" cy="3207258"/>
-          </a:xfrm>
-          <a:prstGeom prst="rect">
-            <a:avLst/>
-          </a:prstGeom>
-        </p:spPr>
-        <p:txBody>
-          <a:bodyPr vert="horz" lIns="91440" tIns="45720" rIns="91440" bIns="45720" rtlCol="0">
-            <a:normAutofit/>
-          </a:bodyPr>
-          <a:lstStyle/>
-          <a:p>
-            <a:pPr indent="-228600">
-              <a:lnSpc>
-                <a:spcPct val="90000"/>
-              </a:lnSpc>
-              <a:spcAft>
-                <a:spcPts val="600"/>
-              </a:spcAft>
-              <a:buFont typeface="Arial" panose="020B0604020202020204" pitchFamily="34" charset="0"/>
-              <a:buChar char="•"/>
-            </a:pPr>
-            <a:r>
-              <a:rPr lang="en-US" sz="1700"/>
-              <a:t>Solid line: SSW calculated response, which used: </a:t>
-            </a:r>
-          </a:p>
-          <a:p>
-            <a:pPr lvl="1" indent="-228600">
-              <a:lnSpc>
-                <a:spcPct val="90000"/>
-              </a:lnSpc>
-              <a:spcAft>
-                <a:spcPts val="600"/>
-              </a:spcAft>
-              <a:buFont typeface="Arial" panose="020B0604020202020204" pitchFamily="34" charset="0"/>
-              <a:buChar char="•"/>
-            </a:pPr>
-            <a:r>
-              <a:rPr lang="en-US" sz="1700"/>
-              <a:t>Chianti v-9</a:t>
-            </a:r>
-          </a:p>
-          <a:p>
-            <a:pPr lvl="1" indent="-228600">
-              <a:lnSpc>
-                <a:spcPct val="90000"/>
-              </a:lnSpc>
-              <a:spcAft>
-                <a:spcPts val="600"/>
-              </a:spcAft>
-              <a:buFont typeface="Arial" panose="020B0604020202020204" pitchFamily="34" charset="0"/>
-              <a:buChar char="•"/>
-            </a:pPr>
-            <a:r>
-              <a:rPr lang="en-US" sz="1700"/>
-              <a:t>Feldman coronal abundance</a:t>
-            </a:r>
-          </a:p>
-          <a:p>
-            <a:pPr marL="285750" indent="-228600">
-              <a:lnSpc>
-                <a:spcPct val="90000"/>
-              </a:lnSpc>
-              <a:spcAft>
-                <a:spcPts val="600"/>
-              </a:spcAft>
-              <a:buFont typeface="Arial" panose="020B0604020202020204" pitchFamily="34" charset="0"/>
-              <a:buChar char="•"/>
-            </a:pPr>
-            <a:endParaRPr lang="en-US" sz="1700" dirty="0"/>
-          </a:p>
-          <a:p>
-            <a:pPr marL="285750" indent="-228600">
-              <a:lnSpc>
-                <a:spcPct val="90000"/>
-              </a:lnSpc>
-              <a:spcAft>
-                <a:spcPts val="600"/>
-              </a:spcAft>
-              <a:buFont typeface="Arial" panose="020B0604020202020204" pitchFamily="34" charset="0"/>
-              <a:buChar char="•"/>
-            </a:pPr>
-            <a:endParaRPr lang="en-US" sz="1700" dirty="0"/>
-          </a:p>
-          <a:p>
-            <a:pPr marL="285750" indent="-228600">
-              <a:lnSpc>
-                <a:spcPct val="90000"/>
-              </a:lnSpc>
-              <a:spcAft>
-                <a:spcPts val="600"/>
-              </a:spcAft>
-              <a:buFont typeface="Arial" panose="020B0604020202020204" pitchFamily="34" charset="0"/>
-              <a:buChar char="•"/>
-            </a:pPr>
-            <a:endParaRPr lang="en-US" sz="1700" dirty="0"/>
-          </a:p>
-        </p:txBody>
-      </p:sp>
-      <p:sp>
-        <p:nvSpPr>
-          <p:cNvPr id="3" name="TextBox 2">
-            <a:extLst>
-              <a:ext uri="{FF2B5EF4-FFF2-40B4-BE49-F238E27FC236}">
-                <a16:creationId xmlns:a16="http://schemas.microsoft.com/office/drawing/2014/main" id="{35816EF0-CADF-3D00-F844-2A2C47756716}"/>
-              </a:ext>
-            </a:extLst>
-          </p:cNvPr>
-          <p:cNvSpPr txBox="1"/>
-          <p:nvPr/>
-        </p:nvSpPr>
-        <p:spPr>
-          <a:xfrm>
-            <a:off x="368808" y="5910094"/>
-            <a:ext cx="2549609" cy="369332"/>
-          </a:xfrm>
-          <a:prstGeom prst="rect">
-            <a:avLst/>
-          </a:prstGeom>
-          <a:noFill/>
-        </p:spPr>
-        <p:txBody>
-          <a:bodyPr wrap="none" rtlCol="0">
-            <a:spAutoFit/>
-          </a:bodyPr>
-          <a:lstStyle/>
-          <a:p>
-            <a:r>
-              <a:rPr lang="en-US" dirty="0"/>
-              <a:t>Overall good agreement</a:t>
-            </a:r>
-          </a:p>
-        </p:txBody>
-      </p:sp>
       <p:pic>
         <p:nvPicPr>
           <p:cNvPr id="4" name="Picture 3">
@@ -6086,6 +5976,131 @@
           </a:prstGeom>
         </p:spPr>
       </p:pic>
+      <p:sp>
+        <p:nvSpPr>
+          <p:cNvPr id="2" name="TextBox 1">
+            <a:extLst>
+              <a:ext uri="{FF2B5EF4-FFF2-40B4-BE49-F238E27FC236}">
+                <a16:creationId xmlns:a16="http://schemas.microsoft.com/office/drawing/2014/main" id="{F36CAE0B-02AE-1B05-3212-E40368404286}"/>
+              </a:ext>
+            </a:extLst>
+          </p:cNvPr>
+          <p:cNvSpPr txBox="1"/>
+          <p:nvPr/>
+        </p:nvSpPr>
+        <p:spPr>
+          <a:xfrm>
+            <a:off x="6096000" y="4734141"/>
+            <a:ext cx="3870400" cy="646331"/>
+          </a:xfrm>
+          <a:prstGeom prst="rect">
+            <a:avLst/>
+          </a:prstGeom>
+        </p:spPr>
+        <p:txBody>
+          <a:bodyPr vert="horz" lIns="91440" tIns="45720" rIns="91440" bIns="45720" rtlCol="0">
+            <a:normAutofit/>
+          </a:bodyPr>
+          <a:lstStyle/>
+          <a:p>
+            <a:pPr indent="-228600">
+              <a:lnSpc>
+                <a:spcPct val="90000"/>
+              </a:lnSpc>
+              <a:spcAft>
+                <a:spcPts val="600"/>
+              </a:spcAft>
+              <a:buFont typeface="Arial" panose="020B0604020202020204" pitchFamily="34" charset="0"/>
+              <a:buChar char="•"/>
+            </a:pPr>
+            <a:r>
+              <a:rPr lang="en-US" sz="1700" dirty="0">
+                <a:solidFill>
+                  <a:schemeClr val="tx2">
+                    <a:lumMod val="75000"/>
+                    <a:lumOff val="25000"/>
+                  </a:schemeClr>
+                </a:solidFill>
+              </a:rPr>
+              <a:t>Solid line: SSW calculated response</a:t>
+            </a:r>
+          </a:p>
+          <a:p>
+            <a:pPr marL="285750" indent="-228600">
+              <a:lnSpc>
+                <a:spcPct val="90000"/>
+              </a:lnSpc>
+              <a:spcAft>
+                <a:spcPts val="600"/>
+              </a:spcAft>
+              <a:buFont typeface="Arial" panose="020B0604020202020204" pitchFamily="34" charset="0"/>
+              <a:buChar char="•"/>
+            </a:pPr>
+            <a:endParaRPr lang="en-US" sz="1700" dirty="0"/>
+          </a:p>
+          <a:p>
+            <a:pPr marL="285750" indent="-228600">
+              <a:lnSpc>
+                <a:spcPct val="90000"/>
+              </a:lnSpc>
+              <a:spcAft>
+                <a:spcPts val="600"/>
+              </a:spcAft>
+              <a:buFont typeface="Arial" panose="020B0604020202020204" pitchFamily="34" charset="0"/>
+              <a:buChar char="•"/>
+            </a:pPr>
+            <a:endParaRPr lang="en-US" sz="1700" dirty="0"/>
+          </a:p>
+          <a:p>
+            <a:pPr marL="285750" indent="-228600">
+              <a:lnSpc>
+                <a:spcPct val="90000"/>
+              </a:lnSpc>
+              <a:spcAft>
+                <a:spcPts val="600"/>
+              </a:spcAft>
+              <a:buFont typeface="Arial" panose="020B0604020202020204" pitchFamily="34" charset="0"/>
+              <a:buChar char="•"/>
+            </a:pPr>
+            <a:endParaRPr lang="en-US" sz="1700" dirty="0"/>
+          </a:p>
+        </p:txBody>
+      </p:sp>
+      <p:sp>
+        <p:nvSpPr>
+          <p:cNvPr id="6" name="TextBox 5">
+            <a:extLst>
+              <a:ext uri="{FF2B5EF4-FFF2-40B4-BE49-F238E27FC236}">
+                <a16:creationId xmlns:a16="http://schemas.microsoft.com/office/drawing/2014/main" id="{8F03B2BD-DD9F-58D8-88E5-16282CFA0D40}"/>
+              </a:ext>
+            </a:extLst>
+          </p:cNvPr>
+          <p:cNvSpPr txBox="1"/>
+          <p:nvPr/>
+        </p:nvSpPr>
+        <p:spPr>
+          <a:xfrm>
+            <a:off x="863008" y="3002711"/>
+            <a:ext cx="2549609" cy="369332"/>
+          </a:xfrm>
+          <a:prstGeom prst="rect">
+            <a:avLst/>
+          </a:prstGeom>
+          <a:noFill/>
+        </p:spPr>
+        <p:txBody>
+          <a:bodyPr wrap="none" rtlCol="0">
+            <a:spAutoFit/>
+          </a:bodyPr>
+          <a:lstStyle/>
+          <a:p>
+            <a:r>
+              <a:rPr lang="en-US" dirty="0"/>
+              <a:t>Overall good agreement</a:t>
+            </a:r>
+          </a:p>
+        </p:txBody>
+      </p:sp>
     </p:spTree>
     <p:extLst>
       <p:ext uri="{BB962C8B-B14F-4D97-AF65-F5344CB8AC3E}">
@@ -6738,156 +6753,6 @@
           </a:p>
         </p:txBody>
       </p:sp>
-      <p:sp>
-        <p:nvSpPr>
-          <p:cNvPr id="8" name="TextBox 7">
-            <a:extLst>
-              <a:ext uri="{FF2B5EF4-FFF2-40B4-BE49-F238E27FC236}">
-                <a16:creationId xmlns:a16="http://schemas.microsoft.com/office/drawing/2014/main" id="{A3427B7B-54FF-073A-F1D6-C4FF4BCACE8F}"/>
-              </a:ext>
-            </a:extLst>
-          </p:cNvPr>
-          <p:cNvSpPr txBox="1"/>
-          <p:nvPr/>
-        </p:nvSpPr>
-        <p:spPr>
-          <a:xfrm>
-            <a:off x="371094" y="2718054"/>
-            <a:ext cx="3438906" cy="3207258"/>
-          </a:xfrm>
-          <a:prstGeom prst="rect">
-            <a:avLst/>
-          </a:prstGeom>
-        </p:spPr>
-        <p:txBody>
-          <a:bodyPr vert="horz" lIns="91440" tIns="45720" rIns="91440" bIns="45720" rtlCol="0">
-            <a:normAutofit/>
-          </a:bodyPr>
-          <a:lstStyle/>
-          <a:p>
-            <a:pPr indent="-228600">
-              <a:lnSpc>
-                <a:spcPct val="90000"/>
-              </a:lnSpc>
-              <a:spcAft>
-                <a:spcPts val="600"/>
-              </a:spcAft>
-              <a:buFont typeface="Arial" panose="020B0604020202020204" pitchFamily="34" charset="0"/>
-              <a:buChar char="•"/>
-            </a:pPr>
-            <a:r>
-              <a:rPr lang="en-US" sz="1700"/>
-              <a:t>Solid line: SSW calculated response, which used: </a:t>
-            </a:r>
-          </a:p>
-          <a:p>
-            <a:pPr lvl="1" indent="-228600">
-              <a:lnSpc>
-                <a:spcPct val="90000"/>
-              </a:lnSpc>
-              <a:spcAft>
-                <a:spcPts val="600"/>
-              </a:spcAft>
-              <a:buFont typeface="Arial" panose="020B0604020202020204" pitchFamily="34" charset="0"/>
-              <a:buChar char="•"/>
-            </a:pPr>
-            <a:r>
-              <a:rPr lang="en-US" sz="1700"/>
-              <a:t>Chianti v-9</a:t>
-            </a:r>
-          </a:p>
-          <a:p>
-            <a:pPr lvl="1" indent="-228600">
-              <a:lnSpc>
-                <a:spcPct val="90000"/>
-              </a:lnSpc>
-              <a:spcAft>
-                <a:spcPts val="600"/>
-              </a:spcAft>
-              <a:buFont typeface="Arial" panose="020B0604020202020204" pitchFamily="34" charset="0"/>
-              <a:buChar char="•"/>
-            </a:pPr>
-            <a:r>
-              <a:rPr lang="en-US" sz="1700"/>
-              <a:t>Feldman coronal abundance</a:t>
-            </a:r>
-          </a:p>
-          <a:p>
-            <a:pPr marL="285750" indent="-228600">
-              <a:lnSpc>
-                <a:spcPct val="90000"/>
-              </a:lnSpc>
-              <a:spcAft>
-                <a:spcPts val="600"/>
-              </a:spcAft>
-              <a:buFont typeface="Arial" panose="020B0604020202020204" pitchFamily="34" charset="0"/>
-              <a:buChar char="•"/>
-            </a:pPr>
-            <a:endParaRPr lang="en-US" sz="1700" dirty="0"/>
-          </a:p>
-          <a:p>
-            <a:pPr marL="285750" indent="-228600">
-              <a:lnSpc>
-                <a:spcPct val="90000"/>
-              </a:lnSpc>
-              <a:spcAft>
-                <a:spcPts val="600"/>
-              </a:spcAft>
-              <a:buFont typeface="Arial" panose="020B0604020202020204" pitchFamily="34" charset="0"/>
-              <a:buChar char="•"/>
-            </a:pPr>
-            <a:endParaRPr lang="en-US" sz="1700" dirty="0"/>
-          </a:p>
-          <a:p>
-            <a:pPr marL="285750" indent="-228600">
-              <a:lnSpc>
-                <a:spcPct val="90000"/>
-              </a:lnSpc>
-              <a:spcAft>
-                <a:spcPts val="600"/>
-              </a:spcAft>
-              <a:buFont typeface="Arial" panose="020B0604020202020204" pitchFamily="34" charset="0"/>
-              <a:buChar char="•"/>
-            </a:pPr>
-            <a:endParaRPr lang="en-US" sz="1700" dirty="0"/>
-          </a:p>
-        </p:txBody>
-      </p:sp>
-      <p:sp>
-        <p:nvSpPr>
-          <p:cNvPr id="3" name="TextBox 2">
-            <a:extLst>
-              <a:ext uri="{FF2B5EF4-FFF2-40B4-BE49-F238E27FC236}">
-                <a16:creationId xmlns:a16="http://schemas.microsoft.com/office/drawing/2014/main" id="{5F125B02-0508-C44D-3C4E-93D0F9E25769}"/>
-              </a:ext>
-            </a:extLst>
-          </p:cNvPr>
-          <p:cNvSpPr txBox="1"/>
-          <p:nvPr/>
-        </p:nvSpPr>
-        <p:spPr>
-          <a:xfrm>
-            <a:off x="368808" y="5910094"/>
-            <a:ext cx="2549609" cy="369332"/>
-          </a:xfrm>
-          <a:prstGeom prst="rect">
-            <a:avLst/>
-          </a:prstGeom>
-          <a:noFill/>
-        </p:spPr>
-        <p:txBody>
-          <a:bodyPr wrap="none" rtlCol="0">
-            <a:spAutoFit/>
-          </a:bodyPr>
-          <a:lstStyle/>
-          <a:p>
-            <a:r>
-              <a:rPr lang="en-US" dirty="0"/>
-              <a:t>Overall good agreement</a:t>
-            </a:r>
-          </a:p>
-        </p:txBody>
-      </p:sp>
       <p:pic>
         <p:nvPicPr>
           <p:cNvPr id="4" name="Picture 3">
@@ -6918,6 +6783,131 @@
           </a:prstGeom>
         </p:spPr>
       </p:pic>
+      <p:sp>
+        <p:nvSpPr>
+          <p:cNvPr id="2" name="TextBox 1">
+            <a:extLst>
+              <a:ext uri="{FF2B5EF4-FFF2-40B4-BE49-F238E27FC236}">
+                <a16:creationId xmlns:a16="http://schemas.microsoft.com/office/drawing/2014/main" id="{D370F134-E9C6-C1BC-4904-CDF046C985F7}"/>
+              </a:ext>
+            </a:extLst>
+          </p:cNvPr>
+          <p:cNvSpPr txBox="1"/>
+          <p:nvPr/>
+        </p:nvSpPr>
+        <p:spPr>
+          <a:xfrm>
+            <a:off x="6188454" y="1285861"/>
+            <a:ext cx="3870400" cy="646331"/>
+          </a:xfrm>
+          <a:prstGeom prst="rect">
+            <a:avLst/>
+          </a:prstGeom>
+        </p:spPr>
+        <p:txBody>
+          <a:bodyPr vert="horz" lIns="91440" tIns="45720" rIns="91440" bIns="45720" rtlCol="0">
+            <a:normAutofit/>
+          </a:bodyPr>
+          <a:lstStyle/>
+          <a:p>
+            <a:pPr indent="-228600">
+              <a:lnSpc>
+                <a:spcPct val="90000"/>
+              </a:lnSpc>
+              <a:spcAft>
+                <a:spcPts val="600"/>
+              </a:spcAft>
+              <a:buFont typeface="Arial" panose="020B0604020202020204" pitchFamily="34" charset="0"/>
+              <a:buChar char="•"/>
+            </a:pPr>
+            <a:r>
+              <a:rPr lang="en-US" sz="1700" dirty="0">
+                <a:solidFill>
+                  <a:schemeClr val="tx2">
+                    <a:lumMod val="75000"/>
+                    <a:lumOff val="25000"/>
+                  </a:schemeClr>
+                </a:solidFill>
+              </a:rPr>
+              <a:t>Solid line: SSW calculated response</a:t>
+            </a:r>
+          </a:p>
+          <a:p>
+            <a:pPr marL="285750" indent="-228600">
+              <a:lnSpc>
+                <a:spcPct val="90000"/>
+              </a:lnSpc>
+              <a:spcAft>
+                <a:spcPts val="600"/>
+              </a:spcAft>
+              <a:buFont typeface="Arial" panose="020B0604020202020204" pitchFamily="34" charset="0"/>
+              <a:buChar char="•"/>
+            </a:pPr>
+            <a:endParaRPr lang="en-US" sz="1700" dirty="0"/>
+          </a:p>
+          <a:p>
+            <a:pPr marL="285750" indent="-228600">
+              <a:lnSpc>
+                <a:spcPct val="90000"/>
+              </a:lnSpc>
+              <a:spcAft>
+                <a:spcPts val="600"/>
+              </a:spcAft>
+              <a:buFont typeface="Arial" panose="020B0604020202020204" pitchFamily="34" charset="0"/>
+              <a:buChar char="•"/>
+            </a:pPr>
+            <a:endParaRPr lang="en-US" sz="1700" dirty="0"/>
+          </a:p>
+          <a:p>
+            <a:pPr marL="285750" indent="-228600">
+              <a:lnSpc>
+                <a:spcPct val="90000"/>
+              </a:lnSpc>
+              <a:spcAft>
+                <a:spcPts val="600"/>
+              </a:spcAft>
+              <a:buFont typeface="Arial" panose="020B0604020202020204" pitchFamily="34" charset="0"/>
+              <a:buChar char="•"/>
+            </a:pPr>
+            <a:endParaRPr lang="en-US" sz="1700" dirty="0"/>
+          </a:p>
+        </p:txBody>
+      </p:sp>
+      <p:sp>
+        <p:nvSpPr>
+          <p:cNvPr id="6" name="TextBox 5">
+            <a:extLst>
+              <a:ext uri="{FF2B5EF4-FFF2-40B4-BE49-F238E27FC236}">
+                <a16:creationId xmlns:a16="http://schemas.microsoft.com/office/drawing/2014/main" id="{7C11D801-39EB-F64C-9499-F1C767259B52}"/>
+              </a:ext>
+            </a:extLst>
+          </p:cNvPr>
+          <p:cNvSpPr txBox="1"/>
+          <p:nvPr/>
+        </p:nvSpPr>
+        <p:spPr>
+          <a:xfrm>
+            <a:off x="863008" y="3002711"/>
+            <a:ext cx="2549609" cy="369332"/>
+          </a:xfrm>
+          <a:prstGeom prst="rect">
+            <a:avLst/>
+          </a:prstGeom>
+          <a:noFill/>
+        </p:spPr>
+        <p:txBody>
+          <a:bodyPr wrap="none" rtlCol="0">
+            <a:spAutoFit/>
+          </a:bodyPr>
+          <a:lstStyle/>
+          <a:p>
+            <a:r>
+              <a:rPr lang="en-US" dirty="0"/>
+              <a:t>Overall good agreement</a:t>
+            </a:r>
+          </a:p>
+        </p:txBody>
+      </p:sp>
     </p:spTree>
     <p:extLst>
       <p:ext uri="{BB962C8B-B14F-4D97-AF65-F5344CB8AC3E}">
@@ -7570,156 +7560,6 @@
           </a:p>
         </p:txBody>
       </p:sp>
-      <p:sp>
-        <p:nvSpPr>
-          <p:cNvPr id="11" name="TextBox 10">
-            <a:extLst>
-              <a:ext uri="{FF2B5EF4-FFF2-40B4-BE49-F238E27FC236}">
-                <a16:creationId xmlns:a16="http://schemas.microsoft.com/office/drawing/2014/main" id="{2BA5D557-FA23-7D34-7A47-D69858C64695}"/>
-              </a:ext>
-            </a:extLst>
-          </p:cNvPr>
-          <p:cNvSpPr txBox="1"/>
-          <p:nvPr/>
-        </p:nvSpPr>
-        <p:spPr>
-          <a:xfrm>
-            <a:off x="371094" y="2718054"/>
-            <a:ext cx="3438906" cy="3207258"/>
-          </a:xfrm>
-          <a:prstGeom prst="rect">
-            <a:avLst/>
-          </a:prstGeom>
-        </p:spPr>
-        <p:txBody>
-          <a:bodyPr vert="horz" lIns="91440" tIns="45720" rIns="91440" bIns="45720" rtlCol="0">
-            <a:normAutofit/>
-          </a:bodyPr>
-          <a:lstStyle/>
-          <a:p>
-            <a:pPr indent="-228600">
-              <a:lnSpc>
-                <a:spcPct val="90000"/>
-              </a:lnSpc>
-              <a:spcAft>
-                <a:spcPts val="600"/>
-              </a:spcAft>
-              <a:buFont typeface="Arial" panose="020B0604020202020204" pitchFamily="34" charset="0"/>
-              <a:buChar char="•"/>
-            </a:pPr>
-            <a:r>
-              <a:rPr lang="en-US" sz="1700" dirty="0"/>
-              <a:t>Solid line: SSW calculated response, which used: </a:t>
-            </a:r>
-          </a:p>
-          <a:p>
-            <a:pPr lvl="1" indent="-228600">
-              <a:lnSpc>
-                <a:spcPct val="90000"/>
-              </a:lnSpc>
-              <a:spcAft>
-                <a:spcPts val="600"/>
-              </a:spcAft>
-              <a:buFont typeface="Arial" panose="020B0604020202020204" pitchFamily="34" charset="0"/>
-              <a:buChar char="•"/>
-            </a:pPr>
-            <a:r>
-              <a:rPr lang="en-US" sz="1700" dirty="0"/>
-              <a:t>Chianti v-9</a:t>
-            </a:r>
-          </a:p>
-          <a:p>
-            <a:pPr lvl="1" indent="-228600">
-              <a:lnSpc>
-                <a:spcPct val="90000"/>
-              </a:lnSpc>
-              <a:spcAft>
-                <a:spcPts val="600"/>
-              </a:spcAft>
-              <a:buFont typeface="Arial" panose="020B0604020202020204" pitchFamily="34" charset="0"/>
-              <a:buChar char="•"/>
-            </a:pPr>
-            <a:r>
-              <a:rPr lang="en-US" sz="1700" dirty="0"/>
-              <a:t>Feldman coronal abundance</a:t>
-            </a:r>
-          </a:p>
-          <a:p>
-            <a:pPr marL="285750" indent="-228600">
-              <a:lnSpc>
-                <a:spcPct val="90000"/>
-              </a:lnSpc>
-              <a:spcAft>
-                <a:spcPts val="600"/>
-              </a:spcAft>
-              <a:buFont typeface="Arial" panose="020B0604020202020204" pitchFamily="34" charset="0"/>
-              <a:buChar char="•"/>
-            </a:pPr>
-            <a:endParaRPr lang="en-US" sz="1700" dirty="0"/>
-          </a:p>
-          <a:p>
-            <a:pPr marL="285750" indent="-228600">
-              <a:lnSpc>
-                <a:spcPct val="90000"/>
-              </a:lnSpc>
-              <a:spcAft>
-                <a:spcPts val="600"/>
-              </a:spcAft>
-              <a:buFont typeface="Arial" panose="020B0604020202020204" pitchFamily="34" charset="0"/>
-              <a:buChar char="•"/>
-            </a:pPr>
-            <a:endParaRPr lang="en-US" sz="1700" dirty="0"/>
-          </a:p>
-          <a:p>
-            <a:pPr marL="285750" indent="-228600">
-              <a:lnSpc>
-                <a:spcPct val="90000"/>
-              </a:lnSpc>
-              <a:spcAft>
-                <a:spcPts val="600"/>
-              </a:spcAft>
-              <a:buFont typeface="Arial" panose="020B0604020202020204" pitchFamily="34" charset="0"/>
-              <a:buChar char="•"/>
-            </a:pPr>
-            <a:endParaRPr lang="en-US" sz="1700" dirty="0"/>
-          </a:p>
-        </p:txBody>
-      </p:sp>
-      <p:sp>
-        <p:nvSpPr>
-          <p:cNvPr id="3" name="TextBox 2">
-            <a:extLst>
-              <a:ext uri="{FF2B5EF4-FFF2-40B4-BE49-F238E27FC236}">
-                <a16:creationId xmlns:a16="http://schemas.microsoft.com/office/drawing/2014/main" id="{190B403E-4D79-BC6E-57B2-4D32411A06AB}"/>
-              </a:ext>
-            </a:extLst>
-          </p:cNvPr>
-          <p:cNvSpPr txBox="1"/>
-          <p:nvPr/>
-        </p:nvSpPr>
-        <p:spPr>
-          <a:xfrm>
-            <a:off x="368808" y="5910094"/>
-            <a:ext cx="2549609" cy="369332"/>
-          </a:xfrm>
-          <a:prstGeom prst="rect">
-            <a:avLst/>
-          </a:prstGeom>
-          <a:noFill/>
-        </p:spPr>
-        <p:txBody>
-          <a:bodyPr wrap="none" rtlCol="0">
-            <a:spAutoFit/>
-          </a:bodyPr>
-          <a:lstStyle/>
-          <a:p>
-            <a:r>
-              <a:rPr lang="en-US" dirty="0"/>
-              <a:t>Overall good agreement</a:t>
-            </a:r>
-          </a:p>
-        </p:txBody>
-      </p:sp>
       <p:pic>
         <p:nvPicPr>
           <p:cNvPr id="4" name="Picture 3">
@@ -7750,6 +7590,131 @@
           </a:prstGeom>
         </p:spPr>
       </p:pic>
+      <p:sp>
+        <p:nvSpPr>
+          <p:cNvPr id="2" name="TextBox 1">
+            <a:extLst>
+              <a:ext uri="{FF2B5EF4-FFF2-40B4-BE49-F238E27FC236}">
+                <a16:creationId xmlns:a16="http://schemas.microsoft.com/office/drawing/2014/main" id="{CDD569DD-CD93-8B61-6A19-C3F61CB12F54}"/>
+              </a:ext>
+            </a:extLst>
+          </p:cNvPr>
+          <p:cNvSpPr txBox="1"/>
+          <p:nvPr/>
+        </p:nvSpPr>
+        <p:spPr>
+          <a:xfrm>
+            <a:off x="5967663" y="4612955"/>
+            <a:ext cx="3870400" cy="646331"/>
+          </a:xfrm>
+          <a:prstGeom prst="rect">
+            <a:avLst/>
+          </a:prstGeom>
+        </p:spPr>
+        <p:txBody>
+          <a:bodyPr vert="horz" lIns="91440" tIns="45720" rIns="91440" bIns="45720" rtlCol="0">
+            <a:normAutofit/>
+          </a:bodyPr>
+          <a:lstStyle/>
+          <a:p>
+            <a:pPr indent="-228600">
+              <a:lnSpc>
+                <a:spcPct val="90000"/>
+              </a:lnSpc>
+              <a:spcAft>
+                <a:spcPts val="600"/>
+              </a:spcAft>
+              <a:buFont typeface="Arial" panose="020B0604020202020204" pitchFamily="34" charset="0"/>
+              <a:buChar char="•"/>
+            </a:pPr>
+            <a:r>
+              <a:rPr lang="en-US" sz="1700" dirty="0">
+                <a:solidFill>
+                  <a:schemeClr val="tx2">
+                    <a:lumMod val="75000"/>
+                    <a:lumOff val="25000"/>
+                  </a:schemeClr>
+                </a:solidFill>
+              </a:rPr>
+              <a:t>Solid line: SSW calculated response</a:t>
+            </a:r>
+          </a:p>
+          <a:p>
+            <a:pPr marL="285750" indent="-228600">
+              <a:lnSpc>
+                <a:spcPct val="90000"/>
+              </a:lnSpc>
+              <a:spcAft>
+                <a:spcPts val="600"/>
+              </a:spcAft>
+              <a:buFont typeface="Arial" panose="020B0604020202020204" pitchFamily="34" charset="0"/>
+              <a:buChar char="•"/>
+            </a:pPr>
+            <a:endParaRPr lang="en-US" sz="1700" dirty="0"/>
+          </a:p>
+          <a:p>
+            <a:pPr marL="285750" indent="-228600">
+              <a:lnSpc>
+                <a:spcPct val="90000"/>
+              </a:lnSpc>
+              <a:spcAft>
+                <a:spcPts val="600"/>
+              </a:spcAft>
+              <a:buFont typeface="Arial" panose="020B0604020202020204" pitchFamily="34" charset="0"/>
+              <a:buChar char="•"/>
+            </a:pPr>
+            <a:endParaRPr lang="en-US" sz="1700" dirty="0"/>
+          </a:p>
+          <a:p>
+            <a:pPr marL="285750" indent="-228600">
+              <a:lnSpc>
+                <a:spcPct val="90000"/>
+              </a:lnSpc>
+              <a:spcAft>
+                <a:spcPts val="600"/>
+              </a:spcAft>
+              <a:buFont typeface="Arial" panose="020B0604020202020204" pitchFamily="34" charset="0"/>
+              <a:buChar char="•"/>
+            </a:pPr>
+            <a:endParaRPr lang="en-US" sz="1700" dirty="0"/>
+          </a:p>
+        </p:txBody>
+      </p:sp>
+      <p:sp>
+        <p:nvSpPr>
+          <p:cNvPr id="7" name="TextBox 6">
+            <a:extLst>
+              <a:ext uri="{FF2B5EF4-FFF2-40B4-BE49-F238E27FC236}">
+                <a16:creationId xmlns:a16="http://schemas.microsoft.com/office/drawing/2014/main" id="{67FFA76A-6981-722A-6CE6-990B8D9DC0D8}"/>
+              </a:ext>
+            </a:extLst>
+          </p:cNvPr>
+          <p:cNvSpPr txBox="1"/>
+          <p:nvPr/>
+        </p:nvSpPr>
+        <p:spPr>
+          <a:xfrm>
+            <a:off x="863008" y="3002711"/>
+            <a:ext cx="2549609" cy="369332"/>
+          </a:xfrm>
+          <a:prstGeom prst="rect">
+            <a:avLst/>
+          </a:prstGeom>
+          <a:noFill/>
+        </p:spPr>
+        <p:txBody>
+          <a:bodyPr wrap="none" rtlCol="0">
+            <a:spAutoFit/>
+          </a:bodyPr>
+          <a:lstStyle/>
+          <a:p>
+            <a:r>
+              <a:rPr lang="en-US" dirty="0"/>
+              <a:t>Overall good agreement</a:t>
+            </a:r>
+          </a:p>
+        </p:txBody>
+      </p:sp>
     </p:spTree>
     <p:extLst>
       <p:ext uri="{BB962C8B-B14F-4D97-AF65-F5344CB8AC3E}">
@@ -8402,162 +8367,6 @@
           </a:p>
         </p:txBody>
       </p:sp>
-      <p:sp>
-        <p:nvSpPr>
-          <p:cNvPr id="8" name="TextBox 7">
-            <a:extLst>
-              <a:ext uri="{FF2B5EF4-FFF2-40B4-BE49-F238E27FC236}">
-                <a16:creationId xmlns:a16="http://schemas.microsoft.com/office/drawing/2014/main" id="{33078D77-53F5-5060-0835-721F0633FA09}"/>
-              </a:ext>
-            </a:extLst>
-          </p:cNvPr>
-          <p:cNvSpPr txBox="1"/>
-          <p:nvPr/>
-        </p:nvSpPr>
-        <p:spPr>
-          <a:xfrm>
-            <a:off x="371094" y="2718054"/>
-            <a:ext cx="3438906" cy="3207258"/>
-          </a:xfrm>
-          <a:prstGeom prst="rect">
-            <a:avLst/>
-          </a:prstGeom>
-        </p:spPr>
-        <p:txBody>
-          <a:bodyPr vert="horz" lIns="91440" tIns="45720" rIns="91440" bIns="45720" rtlCol="0">
-            <a:normAutofit/>
-          </a:bodyPr>
-          <a:lstStyle/>
-          <a:p>
-            <a:pPr indent="-228600">
-              <a:lnSpc>
-                <a:spcPct val="90000"/>
-              </a:lnSpc>
-              <a:spcAft>
-                <a:spcPts val="600"/>
-              </a:spcAft>
-              <a:buFont typeface="Arial" panose="020B0604020202020204" pitchFamily="34" charset="0"/>
-              <a:buChar char="•"/>
-            </a:pPr>
-            <a:r>
-              <a:rPr lang="en-US" sz="1700" dirty="0"/>
-              <a:t>Solid line: SSW calculated response, which used: </a:t>
-            </a:r>
-          </a:p>
-          <a:p>
-            <a:pPr lvl="1" indent="-228600">
-              <a:lnSpc>
-                <a:spcPct val="90000"/>
-              </a:lnSpc>
-              <a:spcAft>
-                <a:spcPts val="600"/>
-              </a:spcAft>
-              <a:buFont typeface="Arial" panose="020B0604020202020204" pitchFamily="34" charset="0"/>
-              <a:buChar char="•"/>
-            </a:pPr>
-            <a:r>
-              <a:rPr lang="en-US" sz="1700" dirty="0"/>
-              <a:t>Chianti v-9</a:t>
-            </a:r>
-          </a:p>
-          <a:p>
-            <a:pPr lvl="1" indent="-228600">
-              <a:lnSpc>
-                <a:spcPct val="90000"/>
-              </a:lnSpc>
-              <a:spcAft>
-                <a:spcPts val="600"/>
-              </a:spcAft>
-              <a:buFont typeface="Arial" panose="020B0604020202020204" pitchFamily="34" charset="0"/>
-              <a:buChar char="•"/>
-            </a:pPr>
-            <a:r>
-              <a:rPr lang="en-US" sz="1700" dirty="0"/>
-              <a:t>Feldman coronal abundance</a:t>
-            </a:r>
-          </a:p>
-          <a:p>
-            <a:pPr marL="285750" indent="-228600">
-              <a:lnSpc>
-                <a:spcPct val="90000"/>
-              </a:lnSpc>
-              <a:spcAft>
-                <a:spcPts val="600"/>
-              </a:spcAft>
-              <a:buFont typeface="Arial" panose="020B0604020202020204" pitchFamily="34" charset="0"/>
-              <a:buChar char="•"/>
-            </a:pPr>
-            <a:endParaRPr lang="en-US" sz="1700" dirty="0"/>
-          </a:p>
-          <a:p>
-            <a:pPr marL="285750" indent="-228600">
-              <a:lnSpc>
-                <a:spcPct val="90000"/>
-              </a:lnSpc>
-              <a:spcAft>
-                <a:spcPts val="600"/>
-              </a:spcAft>
-              <a:buFont typeface="Arial" panose="020B0604020202020204" pitchFamily="34" charset="0"/>
-              <a:buChar char="•"/>
-            </a:pPr>
-            <a:endParaRPr lang="en-US" sz="1700" dirty="0"/>
-          </a:p>
-          <a:p>
-            <a:pPr marL="285750" indent="-228600">
-              <a:lnSpc>
-                <a:spcPct val="90000"/>
-              </a:lnSpc>
-              <a:spcAft>
-                <a:spcPts val="600"/>
-              </a:spcAft>
-              <a:buFont typeface="Arial" panose="020B0604020202020204" pitchFamily="34" charset="0"/>
-              <a:buChar char="•"/>
-            </a:pPr>
-            <a:endParaRPr lang="en-US" sz="1700" dirty="0"/>
-          </a:p>
-        </p:txBody>
-      </p:sp>
-      <p:sp>
-        <p:nvSpPr>
-          <p:cNvPr id="3" name="TextBox 2">
-            <a:extLst>
-              <a:ext uri="{FF2B5EF4-FFF2-40B4-BE49-F238E27FC236}">
-                <a16:creationId xmlns:a16="http://schemas.microsoft.com/office/drawing/2014/main" id="{E71042DC-A2FC-CFDB-91E5-E99B1F62622E}"/>
-              </a:ext>
-            </a:extLst>
-          </p:cNvPr>
-          <p:cNvSpPr txBox="1"/>
-          <p:nvPr/>
-        </p:nvSpPr>
-        <p:spPr>
-          <a:xfrm>
-            <a:off x="439628" y="5696712"/>
-            <a:ext cx="5127237" cy="646331"/>
-          </a:xfrm>
-          <a:prstGeom prst="rect">
-            <a:avLst/>
-          </a:prstGeom>
-          <a:noFill/>
-        </p:spPr>
-        <p:txBody>
-          <a:bodyPr wrap="none" rtlCol="0">
-            <a:spAutoFit/>
-          </a:bodyPr>
-          <a:lstStyle/>
-          <a:p>
-            <a:r>
-              <a:rPr lang="en-US" dirty="0"/>
-              <a:t>This passband show significant deviation.</a:t>
-            </a:r>
-          </a:p>
-          <a:p>
-            <a:r>
-              <a:rPr lang="en-US" b="1" dirty="0"/>
-              <a:t>- Change of atomic data in new Chianti version?</a:t>
-            </a:r>
-          </a:p>
-        </p:txBody>
-      </p:sp>
       <p:pic>
         <p:nvPicPr>
           <p:cNvPr id="4" name="Picture 3">
@@ -8588,6 +8397,141 @@
           </a:prstGeom>
         </p:spPr>
       </p:pic>
+      <p:sp>
+        <p:nvSpPr>
+          <p:cNvPr id="2" name="TextBox 1">
+            <a:extLst>
+              <a:ext uri="{FF2B5EF4-FFF2-40B4-BE49-F238E27FC236}">
+                <a16:creationId xmlns:a16="http://schemas.microsoft.com/office/drawing/2014/main" id="{E3748179-5DB8-14B9-17CD-BCD0A3AE066F}"/>
+              </a:ext>
+            </a:extLst>
+          </p:cNvPr>
+          <p:cNvSpPr txBox="1"/>
+          <p:nvPr/>
+        </p:nvSpPr>
+        <p:spPr>
+          <a:xfrm>
+            <a:off x="5835460" y="5036252"/>
+            <a:ext cx="3870400" cy="646331"/>
+          </a:xfrm>
+          <a:prstGeom prst="rect">
+            <a:avLst/>
+          </a:prstGeom>
+        </p:spPr>
+        <p:txBody>
+          <a:bodyPr vert="horz" lIns="91440" tIns="45720" rIns="91440" bIns="45720" rtlCol="0">
+            <a:normAutofit/>
+          </a:bodyPr>
+          <a:lstStyle/>
+          <a:p>
+            <a:pPr indent="-228600">
+              <a:lnSpc>
+                <a:spcPct val="90000"/>
+              </a:lnSpc>
+              <a:spcAft>
+                <a:spcPts val="600"/>
+              </a:spcAft>
+              <a:buFont typeface="Arial" panose="020B0604020202020204" pitchFamily="34" charset="0"/>
+              <a:buChar char="•"/>
+            </a:pPr>
+            <a:r>
+              <a:rPr lang="en-US" sz="1700" dirty="0">
+                <a:solidFill>
+                  <a:schemeClr val="tx2">
+                    <a:lumMod val="75000"/>
+                    <a:lumOff val="25000"/>
+                  </a:schemeClr>
+                </a:solidFill>
+              </a:rPr>
+              <a:t>Solid line: SSW calculated response</a:t>
+            </a:r>
+          </a:p>
+          <a:p>
+            <a:pPr marL="285750" indent="-228600">
+              <a:lnSpc>
+                <a:spcPct val="90000"/>
+              </a:lnSpc>
+              <a:spcAft>
+                <a:spcPts val="600"/>
+              </a:spcAft>
+              <a:buFont typeface="Arial" panose="020B0604020202020204" pitchFamily="34" charset="0"/>
+              <a:buChar char="•"/>
+            </a:pPr>
+            <a:endParaRPr lang="en-US" sz="1700" dirty="0"/>
+          </a:p>
+          <a:p>
+            <a:pPr marL="285750" indent="-228600">
+              <a:lnSpc>
+                <a:spcPct val="90000"/>
+              </a:lnSpc>
+              <a:spcAft>
+                <a:spcPts val="600"/>
+              </a:spcAft>
+              <a:buFont typeface="Arial" panose="020B0604020202020204" pitchFamily="34" charset="0"/>
+              <a:buChar char="•"/>
+            </a:pPr>
+            <a:endParaRPr lang="en-US" sz="1700" dirty="0"/>
+          </a:p>
+          <a:p>
+            <a:pPr marL="285750" indent="-228600">
+              <a:lnSpc>
+                <a:spcPct val="90000"/>
+              </a:lnSpc>
+              <a:spcAft>
+                <a:spcPts val="600"/>
+              </a:spcAft>
+              <a:buFont typeface="Arial" panose="020B0604020202020204" pitchFamily="34" charset="0"/>
+              <a:buChar char="•"/>
+            </a:pPr>
+            <a:endParaRPr lang="en-US" sz="1700" dirty="0"/>
+          </a:p>
+        </p:txBody>
+      </p:sp>
+      <p:sp>
+        <p:nvSpPr>
+          <p:cNvPr id="3" name="TextBox 2">
+            <a:extLst>
+              <a:ext uri="{FF2B5EF4-FFF2-40B4-BE49-F238E27FC236}">
+                <a16:creationId xmlns:a16="http://schemas.microsoft.com/office/drawing/2014/main" id="{E71042DC-A2FC-CFDB-91E5-E99B1F62622E}"/>
+              </a:ext>
+            </a:extLst>
+          </p:cNvPr>
+          <p:cNvSpPr txBox="1"/>
+          <p:nvPr/>
+        </p:nvSpPr>
+        <p:spPr>
+          <a:xfrm>
+            <a:off x="0" y="2874824"/>
+            <a:ext cx="4770304" cy="1200329"/>
+          </a:xfrm>
+          <a:prstGeom prst="rect">
+            <a:avLst/>
+          </a:prstGeom>
+          <a:noFill/>
+        </p:spPr>
+        <p:txBody>
+          <a:bodyPr wrap="square" rtlCol="0">
+            <a:spAutoFit/>
+          </a:bodyPr>
+          <a:lstStyle/>
+          <a:p>
+            <a:r>
+              <a:rPr lang="en-US" dirty="0"/>
+              <a:t>This passband show significant deviation.</a:t>
+            </a:r>
+          </a:p>
+          <a:p>
+            <a:pPr marL="285750" indent="-285750">
+              <a:buFontTx/>
+              <a:buChar char="-"/>
+            </a:pPr>
+            <a:r>
+              <a:rPr lang="en-US" b="1" dirty="0"/>
+              <a:t>SSW uses some empirical factor to compensate optically thick He-II emission?</a:t>
+            </a:r>
+          </a:p>
+        </p:txBody>
+      </p:sp>
     </p:spTree>
     <p:extLst>
       <p:ext uri="{BB962C8B-B14F-4D97-AF65-F5344CB8AC3E}">
@@ -9242,10 +9186,10 @@
       </p:sp>
       <p:sp>
         <p:nvSpPr>
-          <p:cNvPr id="9" name="TextBox 8">
-            <a:extLst>
-              <a:ext uri="{FF2B5EF4-FFF2-40B4-BE49-F238E27FC236}">
-                <a16:creationId xmlns:a16="http://schemas.microsoft.com/office/drawing/2014/main" id="{523D487D-2A8D-A85F-7DEC-FF127A83D5F6}"/>
+          <p:cNvPr id="3" name="TextBox 2">
+            <a:extLst>
+              <a:ext uri="{FF2B5EF4-FFF2-40B4-BE49-F238E27FC236}">
+                <a16:creationId xmlns:a16="http://schemas.microsoft.com/office/drawing/2014/main" id="{01E05E28-6183-8B23-4E92-E8D4A9456DDA}"/>
               </a:ext>
             </a:extLst>
           </p:cNvPr>
@@ -9254,122 +9198,7 @@
         </p:nvSpPr>
         <p:spPr>
           <a:xfrm>
-            <a:off x="371094" y="2718054"/>
-            <a:ext cx="3438906" cy="3207258"/>
-          </a:xfrm>
-          <a:prstGeom prst="rect">
-            <a:avLst/>
-          </a:prstGeom>
-        </p:spPr>
-        <p:txBody>
-          <a:bodyPr vert="horz" lIns="91440" tIns="45720" rIns="91440" bIns="45720" rtlCol="0">
-            <a:normAutofit/>
-          </a:bodyPr>
-          <a:lstStyle/>
-          <a:p>
-            <a:pPr indent="-228600">
-              <a:lnSpc>
-                <a:spcPct val="90000"/>
-              </a:lnSpc>
-              <a:spcAft>
-                <a:spcPts val="600"/>
-              </a:spcAft>
-              <a:buFont typeface="Arial" panose="020B0604020202020204" pitchFamily="34" charset="0"/>
-              <a:buChar char="•"/>
-            </a:pPr>
-            <a:r>
-              <a:rPr lang="en-US" sz="1700" dirty="0"/>
-              <a:t>Solid line: SSW calculated response, which used: </a:t>
-            </a:r>
-          </a:p>
-          <a:p>
-            <a:pPr lvl="1" indent="-228600">
-              <a:lnSpc>
-                <a:spcPct val="90000"/>
-              </a:lnSpc>
-              <a:spcAft>
-                <a:spcPts val="600"/>
-              </a:spcAft>
-              <a:buFont typeface="Arial" panose="020B0604020202020204" pitchFamily="34" charset="0"/>
-              <a:buChar char="•"/>
-            </a:pPr>
-            <a:r>
-              <a:rPr lang="en-US" sz="1700" dirty="0"/>
-              <a:t>Chianti v-9</a:t>
-            </a:r>
-          </a:p>
-          <a:p>
-            <a:pPr lvl="1" indent="-228600">
-              <a:lnSpc>
-                <a:spcPct val="90000"/>
-              </a:lnSpc>
-              <a:spcAft>
-                <a:spcPts val="600"/>
-              </a:spcAft>
-              <a:buFont typeface="Arial" panose="020B0604020202020204" pitchFamily="34" charset="0"/>
-              <a:buChar char="•"/>
-            </a:pPr>
-            <a:r>
-              <a:rPr lang="en-US" sz="1700" dirty="0"/>
-              <a:t>Feldman coronal abundance</a:t>
-            </a:r>
-          </a:p>
-          <a:p>
-            <a:pPr marL="285750" indent="-228600">
-              <a:lnSpc>
-                <a:spcPct val="90000"/>
-              </a:lnSpc>
-              <a:spcAft>
-                <a:spcPts val="600"/>
-              </a:spcAft>
-              <a:buFont typeface="Arial" panose="020B0604020202020204" pitchFamily="34" charset="0"/>
-              <a:buChar char="•"/>
-            </a:pPr>
-            <a:endParaRPr lang="en-US" sz="1700" dirty="0"/>
-          </a:p>
-          <a:p>
-            <a:pPr marL="285750" indent="-228600">
-              <a:lnSpc>
-                <a:spcPct val="90000"/>
-              </a:lnSpc>
-              <a:spcAft>
-                <a:spcPts val="600"/>
-              </a:spcAft>
-              <a:buFont typeface="Arial" panose="020B0604020202020204" pitchFamily="34" charset="0"/>
-              <a:buChar char="•"/>
-            </a:pPr>
-            <a:endParaRPr lang="en-US" sz="1700" dirty="0"/>
-          </a:p>
-          <a:p>
-            <a:pPr marL="285750" indent="-228600">
-              <a:lnSpc>
-                <a:spcPct val="90000"/>
-              </a:lnSpc>
-              <a:spcAft>
-                <a:spcPts val="600"/>
-              </a:spcAft>
-              <a:buFont typeface="Arial" panose="020B0604020202020204" pitchFamily="34" charset="0"/>
-              <a:buChar char="•"/>
-            </a:pPr>
-            <a:endParaRPr lang="en-US" sz="1700" dirty="0"/>
-          </a:p>
-        </p:txBody>
-      </p:sp>
-      <p:sp>
-        <p:nvSpPr>
-          <p:cNvPr id="3" name="TextBox 2">
-            <a:extLst>
-              <a:ext uri="{FF2B5EF4-FFF2-40B4-BE49-F238E27FC236}">
-                <a16:creationId xmlns:a16="http://schemas.microsoft.com/office/drawing/2014/main" id="{01E05E28-6183-8B23-4E92-E8D4A9456DDA}"/>
-              </a:ext>
-            </a:extLst>
-          </p:cNvPr>
-          <p:cNvSpPr txBox="1"/>
-          <p:nvPr/>
-        </p:nvSpPr>
-        <p:spPr>
-          <a:xfrm>
-            <a:off x="368808" y="5910094"/>
+            <a:off x="863008" y="3002711"/>
             <a:ext cx="2549609" cy="369332"/>
           </a:xfrm>
           <a:prstGeom prst="rect">
@@ -9420,6 +9249,96 @@
           </a:prstGeom>
         </p:spPr>
       </p:pic>
+      <p:sp>
+        <p:nvSpPr>
+          <p:cNvPr id="2" name="TextBox 1">
+            <a:extLst>
+              <a:ext uri="{FF2B5EF4-FFF2-40B4-BE49-F238E27FC236}">
+                <a16:creationId xmlns:a16="http://schemas.microsoft.com/office/drawing/2014/main" id="{5937EF3A-4764-FE86-3638-2F5BE66CEFC5}"/>
+              </a:ext>
+            </a:extLst>
+          </p:cNvPr>
+          <p:cNvSpPr txBox="1"/>
+          <p:nvPr/>
+        </p:nvSpPr>
+        <p:spPr>
+          <a:xfrm>
+            <a:off x="7443923" y="2864212"/>
+            <a:ext cx="3870400" cy="646331"/>
+          </a:xfrm>
+          <a:prstGeom prst="rect">
+            <a:avLst/>
+          </a:prstGeom>
+        </p:spPr>
+        <p:txBody>
+          <a:bodyPr vert="horz" lIns="91440" tIns="45720" rIns="91440" bIns="45720" rtlCol="0">
+            <a:normAutofit/>
+          </a:bodyPr>
+          <a:lstStyle/>
+          <a:p>
+            <a:pPr indent="-228600">
+              <a:lnSpc>
+                <a:spcPct val="90000"/>
+              </a:lnSpc>
+              <a:spcAft>
+                <a:spcPts val="600"/>
+              </a:spcAft>
+              <a:buFont typeface="Arial" panose="020B0604020202020204" pitchFamily="34" charset="0"/>
+              <a:buChar char="•"/>
+            </a:pPr>
+            <a:r>
+              <a:rPr lang="en-US" sz="1700" dirty="0">
+                <a:solidFill>
+                  <a:schemeClr val="tx2">
+                    <a:lumMod val="75000"/>
+                    <a:lumOff val="25000"/>
+                  </a:schemeClr>
+                </a:solidFill>
+              </a:rPr>
+              <a:t>Solid line: SSW calculated response</a:t>
+            </a:r>
+          </a:p>
+          <a:p>
+            <a:pPr marL="285750" indent="-228600">
+              <a:lnSpc>
+                <a:spcPct val="90000"/>
+              </a:lnSpc>
+              <a:spcAft>
+                <a:spcPts val="600"/>
+              </a:spcAft>
+              <a:buFont typeface="Arial" panose="020B0604020202020204" pitchFamily="34" charset="0"/>
+              <a:buChar char="•"/>
+            </a:pPr>
+            <a:endParaRPr lang="en-US" sz="1700" dirty="0"/>
+          </a:p>
+          <a:p>
+            <a:pPr marL="285750" indent="-228600">
+              <a:lnSpc>
+                <a:spcPct val="90000"/>
+              </a:lnSpc>
+              <a:spcAft>
+                <a:spcPts val="600"/>
+              </a:spcAft>
+              <a:buFont typeface="Arial" panose="020B0604020202020204" pitchFamily="34" charset="0"/>
+              <a:buChar char="•"/>
+            </a:pPr>
+            <a:endParaRPr lang="en-US" sz="1700" dirty="0"/>
+          </a:p>
+          <a:p>
+            <a:pPr marL="285750" indent="-228600">
+              <a:lnSpc>
+                <a:spcPct val="90000"/>
+              </a:lnSpc>
+              <a:spcAft>
+                <a:spcPts val="600"/>
+              </a:spcAft>
+              <a:buFont typeface="Arial" panose="020B0604020202020204" pitchFamily="34" charset="0"/>
+              <a:buChar char="•"/>
+            </a:pPr>
+            <a:endParaRPr lang="en-US" sz="1700" dirty="0"/>
+          </a:p>
+        </p:txBody>
+      </p:sp>
     </p:spTree>
     <p:extLst>
       <p:ext uri="{BB962C8B-B14F-4D97-AF65-F5344CB8AC3E}">
